--- a/latex/figure/fig2_introact_architecture.pptx
+++ b/latex/figure/fig2_introact_architecture.pptx
@@ -7,7 +7,7 @@
   <p:sldIdLst>
     <p:sldId id="256" r:id="rId7"/>
   </p:sldIdLst>
-  <p:sldSz cx="5029200" cy="2946400" type="screen4x3"/>
+  <p:sldSz cx="5029200" cy="2616200" type="screen4x3"/>
   <p:notesSz cx="6858000" cy="9144000"/>
   <p:defaultTextStyle>
     <a:defPPr>
@@ -3096,8 +3096,8 @@
         </p:nvSpPr>
         <p:spPr>
           <a:xfrm>
-            <a:off x="-1473200" y="8000"/>
-            <a:ext cx="3048000" cy="188976"/>
+            <a:off x="-1473200" y="11429"/>
+            <a:ext cx="3048000" cy="182879"/>
           </a:xfrm>
           <a:prstGeom prst="rect">
             <a:avLst/>
@@ -3112,13 +3112,13 @@
           <a:p>
             <a:pPr algn="l"/>
             <a:r>
-              <a:rPr sz="620" b="1" i="0">
-                <a:solidFill>
-                  <a:srgbClr val="1C1E23"/>
+              <a:rPr sz="600" b="1" i="0">
+                <a:solidFill>
+                  <a:srgbClr val="19704F"/>
                 </a:solidFill>
                 <a:latin typeface="Helvetica"/>
               </a:rPr>
-              <a:t>Deployment request (frozen TSFM, no future label)</a:t>
+              <a:t>Offline  (TRAIN only — the only place a future is read)</a:t>
             </a:r>
           </a:p>
         </p:txBody>
@@ -3131,20 +3131,20 @@
         </p:nvSpPr>
         <p:spPr>
           <a:xfrm>
-            <a:off x="50800" y="177800"/>
-            <a:ext cx="1219200" cy="304800"/>
+            <a:off x="50800" y="190500"/>
+            <a:ext cx="1155700" cy="431800"/>
           </a:xfrm>
           <a:prstGeom prst="roundRect">
             <a:avLst>
-              <a:gd name="adj" fmla="val 1302"/>
+              <a:gd name="adj" fmla="val 1373"/>
             </a:avLst>
           </a:prstGeom>
           <a:solidFill>
-            <a:srgbClr val="FCEAEA"/>
+            <a:srgbClr val="FFFFFF"/>
           </a:solidFill>
           <a:ln w="8890">
             <a:solidFill>
-              <a:srgbClr val="AD2B2B"/>
+              <a:srgbClr val="CCCED3"/>
             </a:solidFill>
           </a:ln>
           <a:effectLst/>
@@ -3179,8 +3179,8 @@
         </p:nvSpPr>
         <p:spPr>
           <a:xfrm>
-            <a:off x="-863600" y="203377"/>
-            <a:ext cx="3048000" cy="176784"/>
+            <a:off x="-895350" y="252323"/>
+            <a:ext cx="3048000" cy="152400"/>
           </a:xfrm>
           <a:prstGeom prst="rect">
             <a:avLst/>
@@ -3195,13 +3195,13 @@
           <a:p>
             <a:pPr algn="ctr"/>
             <a:r>
-              <a:rPr sz="580" b="0" i="0">
+              <a:rPr sz="500" b="0" i="0">
                 <a:solidFill>
                   <a:srgbClr val="1C1E23"/>
                 </a:solidFill>
                 <a:latin typeface="Helvetica"/>
               </a:rPr>
-              <a:t>Incomplete context</a:t>
+              <a:t>Complete historical window</a:t>
             </a:r>
           </a:p>
         </p:txBody>
@@ -3214,8 +3214,8 @@
         </p:nvSpPr>
         <p:spPr>
           <a:xfrm>
-            <a:off x="-863600" y="301167"/>
-            <a:ext cx="3048000" cy="176784"/>
+            <a:off x="-895350" y="339953"/>
+            <a:ext cx="3048000" cy="152400"/>
           </a:xfrm>
           <a:prstGeom prst="rect">
             <a:avLst/>
@@ -3230,27 +3230,62 @@
           <a:p>
             <a:pPr algn="ctr"/>
             <a:r>
-              <a:rPr sz="580" b="0" i="0">
+              <a:rPr sz="500" b="0" i="0">
                 <a:solidFill>
                   <a:srgbClr val="1C1E23"/>
                 </a:solidFill>
                 <a:latin typeface="Helvetica"/>
               </a:rPr>
-              <a:t>X  with mask M</a:t>
+              <a:t>(X_i, y_i); its future</a:t>
+            </a:r>
+          </a:p>
+        </p:txBody>
+      </p:sp>
+      <p:sp>
+        <p:nvSpPr>
+          <p:cNvPr id="6" name="TextBox 5"/>
+          <p:cNvSpPr txBox="1"/>
+          <p:nvPr/>
+        </p:nvSpPr>
+        <p:spPr>
+          <a:xfrm>
+            <a:off x="-895350" y="427583"/>
+            <a:ext cx="3048000" cy="152400"/>
+          </a:xfrm>
+          <a:prstGeom prst="rect">
+            <a:avLst/>
+          </a:prstGeom>
+          <a:noFill/>
+        </p:spPr>
+        <p:txBody>
+          <a:bodyPr wrap="none" lIns="0" rIns="0" tIns="0" bIns="0" anchor="ctr">
+            <a:spAutoFit/>
+          </a:bodyPr>
+          <a:lstStyle/>
+          <a:p>
+            <a:pPr algn="ctr"/>
+            <a:r>
+              <a:rPr sz="500" b="0" i="0">
+                <a:solidFill>
+                  <a:srgbClr val="1C1E23"/>
+                </a:solidFill>
+                <a:latin typeface="Helvetica"/>
+              </a:rPr>
+              <a:t>is already legal history</a:t>
             </a:r>
           </a:p>
         </p:txBody>
       </p:sp>
       <p:cxnSp>
         <p:nvCxnSpPr>
-          <p:cNvPr id="6" name="Connector 5"/>
+          <p:cNvPr id="7" name="Connector 6"/>
           <p:cNvCxnSpPr/>
           <p:nvPr/>
         </p:nvCxnSpPr>
         <p:spPr>
           <a:xfrm>
-            <a:off x="1270000" y="330200"/>
-            <a:ext cx="152400" cy="0"/>
+            <a:off x="1212850" y="406400"/>
+            <a:ext cx="88900" cy="0"/>
           </a:xfrm>
           <a:prstGeom prst="bentConnector3">
             <a:avLst/>
@@ -3278,18 +3313,1029 @@
       </p:cxnSp>
       <p:sp>
         <p:nvSpPr>
-          <p:cNvPr id="7" name="Rounded Rectangle 6"/>
+          <p:cNvPr id="8" name="Rounded Rectangle 7"/>
           <p:cNvSpPr/>
           <p:nvPr/>
         </p:nvSpPr>
         <p:spPr>
           <a:xfrm>
-            <a:off x="1435100" y="177800"/>
-            <a:ext cx="1397000" cy="304800"/>
+            <a:off x="1308100" y="190500"/>
+            <a:ext cx="1155700" cy="431800"/>
           </a:xfrm>
           <a:prstGeom prst="roundRect">
             <a:avLst>
-              <a:gd name="adj" fmla="val 1136"/>
+              <a:gd name="adj" fmla="val 1373"/>
+            </a:avLst>
+          </a:prstGeom>
+          <a:solidFill>
+            <a:srgbClr val="FFFFFF"/>
+          </a:solidFill>
+          <a:ln w="8890">
+            <a:solidFill>
+              <a:srgbClr val="CCCED3"/>
+            </a:solidFill>
+          </a:ln>
+          <a:effectLst/>
+        </p:spPr>
+        <p:style>
+          <a:lnRef idx="1">
+            <a:schemeClr val="accent1"/>
+          </a:lnRef>
+          <a:fillRef idx="3">
+            <a:schemeClr val="accent1"/>
+          </a:fillRef>
+          <a:effectRef idx="2">
+            <a:schemeClr val="accent1"/>
+          </a:effectRef>
+          <a:fontRef idx="minor">
+            <a:schemeClr val="lt1"/>
+          </a:fontRef>
+        </p:style>
+        <p:txBody>
+          <a:bodyPr rtlCol="0" anchor="ctr"/>
+          <a:lstStyle/>
+          <a:p>
+            <a:pPr algn="ctr"/>
+          </a:p>
+        </p:txBody>
+      </p:sp>
+      <p:sp>
+        <p:nvSpPr>
+          <p:cNvPr id="9" name="TextBox 8"/>
+          <p:cNvSpPr txBox="1"/>
+          <p:nvPr/>
+        </p:nvSpPr>
+        <p:spPr>
+          <a:xfrm>
+            <a:off x="361950" y="252323"/>
+            <a:ext cx="3048000" cy="152400"/>
+          </a:xfrm>
+          <a:prstGeom prst="rect">
+            <a:avLst/>
+          </a:prstGeom>
+          <a:noFill/>
+        </p:spPr>
+        <p:txBody>
+          <a:bodyPr wrap="none" lIns="0" rIns="0" tIns="0" bIns="0" anchor="ctr">
+            <a:spAutoFit/>
+          </a:bodyPr>
+          <a:lstStyle/>
+          <a:p>
+            <a:pPr algn="ctr"/>
+            <a:r>
+              <a:rPr sz="500" b="0" i="0">
+                <a:solidFill>
+                  <a:srgbClr val="1C1E23"/>
+                </a:solidFill>
+                <a:latin typeface="Helvetica"/>
+              </a:rPr>
+              <a:t>Inject the deployment</a:t>
+            </a:r>
+          </a:p>
+        </p:txBody>
+      </p:sp>
+      <p:sp>
+        <p:nvSpPr>
+          <p:cNvPr id="10" name="TextBox 9"/>
+          <p:cNvSpPr txBox="1"/>
+          <p:nvPr/>
+        </p:nvSpPr>
+        <p:spPr>
+          <a:xfrm>
+            <a:off x="361950" y="339953"/>
+            <a:ext cx="3048000" cy="152400"/>
+          </a:xfrm>
+          <a:prstGeom prst="rect">
+            <a:avLst/>
+          </a:prstGeom>
+          <a:noFill/>
+        </p:spPr>
+        <p:txBody>
+          <a:bodyPr wrap="none" lIns="0" rIns="0" tIns="0" bIns="0" anchor="ctr">
+            <a:spAutoFit/>
+          </a:bodyPr>
+          <a:lstStyle/>
+          <a:p>
+            <a:pPr algn="ctr"/>
+            <a:r>
+              <a:rPr sz="500" b="0" i="0">
+                <a:solidFill>
+                  <a:srgbClr val="1C1E23"/>
+                </a:solidFill>
+                <a:latin typeface="Helvetica"/>
+              </a:rPr>
+              <a:t>missingness mechanism</a:t>
+            </a:r>
+          </a:p>
+        </p:txBody>
+      </p:sp>
+      <p:sp>
+        <p:nvSpPr>
+          <p:cNvPr id="11" name="TextBox 10"/>
+          <p:cNvSpPr txBox="1"/>
+          <p:nvPr/>
+        </p:nvSpPr>
+        <p:spPr>
+          <a:xfrm>
+            <a:off x="361950" y="427583"/>
+            <a:ext cx="3048000" cy="152400"/>
+          </a:xfrm>
+          <a:prstGeom prst="rect">
+            <a:avLst/>
+          </a:prstGeom>
+          <a:noFill/>
+        </p:spPr>
+        <p:txBody>
+          <a:bodyPr wrap="none" lIns="0" rIns="0" tIns="0" bIns="0" anchor="ctr">
+            <a:spAutoFit/>
+          </a:bodyPr>
+          <a:lstStyle/>
+          <a:p>
+            <a:pPr algn="ctr"/>
+            <a:r>
+              <a:rPr sz="500" b="0" i="0">
+                <a:solidFill>
+                  <a:srgbClr val="1C1E23"/>
+                </a:solidFill>
+                <a:latin typeface="Helvetica"/>
+              </a:rPr>
+              <a:t>-&gt; controlled incomplete context</a:t>
+            </a:r>
+          </a:p>
+        </p:txBody>
+      </p:sp>
+      <p:cxnSp>
+        <p:nvCxnSpPr>
+          <p:cNvPr id="12" name="Connector 11"/>
+          <p:cNvCxnSpPr/>
+          <p:nvPr/>
+        </p:nvCxnSpPr>
+        <p:spPr>
+          <a:xfrm>
+            <a:off x="2470150" y="406400"/>
+            <a:ext cx="88900" cy="0"/>
+          </a:xfrm>
+          <a:prstGeom prst="bentConnector3">
+            <a:avLst/>
+          </a:prstGeom>
+          <a:ln w="11430">
+            <a:solidFill>
+              <a:srgbClr val="1C1E23"/>
+            </a:solidFill>
+          </a:ln>
+        </p:spPr>
+        <p:style>
+          <a:lnRef idx="2">
+            <a:schemeClr val="accent1"/>
+          </a:lnRef>
+          <a:fillRef idx="0">
+            <a:schemeClr val="accent1"/>
+          </a:fillRef>
+          <a:effectRef idx="1">
+            <a:schemeClr val="accent1"/>
+          </a:effectRef>
+          <a:fontRef idx="minor">
+            <a:schemeClr val="tx1"/>
+          </a:fontRef>
+        </p:style>
+      </p:cxnSp>
+      <p:sp>
+        <p:nvSpPr>
+          <p:cNvPr id="13" name="Rounded Rectangle 12"/>
+          <p:cNvSpPr/>
+          <p:nvPr/>
+        </p:nvSpPr>
+        <p:spPr>
+          <a:xfrm>
+            <a:off x="2565400" y="190500"/>
+            <a:ext cx="1155700" cy="431800"/>
+          </a:xfrm>
+          <a:prstGeom prst="roundRect">
+            <a:avLst>
+              <a:gd name="adj" fmla="val 1373"/>
+            </a:avLst>
+          </a:prstGeom>
+          <a:solidFill>
+            <a:srgbClr val="FFFFFF"/>
+          </a:solidFill>
+          <a:ln w="8890">
+            <a:solidFill>
+              <a:srgbClr val="CCCED3"/>
+            </a:solidFill>
+          </a:ln>
+          <a:effectLst/>
+        </p:spPr>
+        <p:style>
+          <a:lnRef idx="1">
+            <a:schemeClr val="accent1"/>
+          </a:lnRef>
+          <a:fillRef idx="3">
+            <a:schemeClr val="accent1"/>
+          </a:fillRef>
+          <a:effectRef idx="2">
+            <a:schemeClr val="accent1"/>
+          </a:effectRef>
+          <a:fontRef idx="minor">
+            <a:schemeClr val="lt1"/>
+          </a:fontRef>
+        </p:style>
+        <p:txBody>
+          <a:bodyPr rtlCol="0" anchor="ctr"/>
+          <a:lstStyle/>
+          <a:p>
+            <a:pPr algn="ctr"/>
+          </a:p>
+        </p:txBody>
+      </p:sp>
+      <p:sp>
+        <p:nvSpPr>
+          <p:cNvPr id="14" name="TextBox 13"/>
+          <p:cNvSpPr txBox="1"/>
+          <p:nvPr/>
+        </p:nvSpPr>
+        <p:spPr>
+          <a:xfrm>
+            <a:off x="1619250" y="252323"/>
+            <a:ext cx="3048000" cy="152400"/>
+          </a:xfrm>
+          <a:prstGeom prst="rect">
+            <a:avLst/>
+          </a:prstGeom>
+          <a:noFill/>
+        </p:spPr>
+        <p:txBody>
+          <a:bodyPr wrap="none" lIns="0" rIns="0" tIns="0" bIns="0" anchor="ctr">
+            <a:spAutoFit/>
+          </a:bodyPr>
+          <a:lstStyle/>
+          <a:p>
+            <a:pPr algn="ctr"/>
+            <a:r>
+              <a:rPr sz="500" b="0" i="0">
+                <a:solidFill>
+                  <a:srgbClr val="1C1E23"/>
+                </a:solidFill>
+                <a:latin typeface="Helvetica"/>
+              </a:rPr>
+              <a:t>Execute every legal action</a:t>
+            </a:r>
+          </a:p>
+        </p:txBody>
+      </p:sp>
+      <p:sp>
+        <p:nvSpPr>
+          <p:cNvPr id="15" name="TextBox 14"/>
+          <p:cNvSpPr txBox="1"/>
+          <p:nvPr/>
+        </p:nvSpPr>
+        <p:spPr>
+          <a:xfrm>
+            <a:off x="1619250" y="339953"/>
+            <a:ext cx="3048000" cy="152400"/>
+          </a:xfrm>
+          <a:prstGeom prst="rect">
+            <a:avLst/>
+          </a:prstGeom>
+          <a:noFill/>
+        </p:spPr>
+        <p:txBody>
+          <a:bodyPr wrap="none" lIns="0" rIns="0" tIns="0" bIns="0" anchor="ctr">
+            <a:spAutoFit/>
+          </a:bodyPr>
+          <a:lstStyle/>
+          <a:p>
+            <a:pPr algn="ctr"/>
+            <a:r>
+              <a:rPr sz="500" b="0" i="0">
+                <a:solidFill>
+                  <a:srgbClr val="1C1E23"/>
+                </a:solidFill>
+                <a:latin typeface="Helvetica"/>
+              </a:rPr>
+              <a:t>with the frozen forecaster F;</a:t>
+            </a:r>
+          </a:p>
+        </p:txBody>
+      </p:sp>
+      <p:sp>
+        <p:nvSpPr>
+          <p:cNvPr id="16" name="TextBox 15"/>
+          <p:cNvSpPr txBox="1"/>
+          <p:nvPr/>
+        </p:nvSpPr>
+        <p:spPr>
+          <a:xfrm>
+            <a:off x="1619250" y="427583"/>
+            <a:ext cx="3048000" cy="152400"/>
+          </a:xfrm>
+          <a:prstGeom prst="rect">
+            <a:avLst/>
+          </a:prstGeom>
+          <a:noFill/>
+        </p:spPr>
+        <p:txBody>
+          <a:bodyPr wrap="none" lIns="0" rIns="0" tIns="0" bIns="0" anchor="ctr">
+            <a:spAutoFit/>
+          </a:bodyPr>
+          <a:lstStyle/>
+          <a:p>
+            <a:pPr algn="ctr"/>
+            <a:r>
+              <a:rPr sz="500" b="0" i="0">
+                <a:solidFill>
+                  <a:srgbClr val="1C1E23"/>
+                </a:solidFill>
+                <a:latin typeface="Helvetica"/>
+              </a:rPr>
+              <a:t>record L[i,a] and r[i,a]</a:t>
+            </a:r>
+          </a:p>
+        </p:txBody>
+      </p:sp>
+      <p:cxnSp>
+        <p:nvCxnSpPr>
+          <p:cNvPr id="17" name="Connector 16"/>
+          <p:cNvCxnSpPr/>
+          <p:nvPr/>
+        </p:nvCxnSpPr>
+        <p:spPr>
+          <a:xfrm>
+            <a:off x="3727450" y="406400"/>
+            <a:ext cx="88900" cy="0"/>
+          </a:xfrm>
+          <a:prstGeom prst="bentConnector3">
+            <a:avLst/>
+          </a:prstGeom>
+          <a:ln w="11430">
+            <a:solidFill>
+              <a:srgbClr val="1C1E23"/>
+            </a:solidFill>
+          </a:ln>
+        </p:spPr>
+        <p:style>
+          <a:lnRef idx="2">
+            <a:schemeClr val="accent1"/>
+          </a:lnRef>
+          <a:fillRef idx="0">
+            <a:schemeClr val="accent1"/>
+          </a:fillRef>
+          <a:effectRef idx="1">
+            <a:schemeClr val="accent1"/>
+          </a:effectRef>
+          <a:fontRef idx="minor">
+            <a:schemeClr val="tx1"/>
+          </a:fontRef>
+        </p:style>
+      </p:cxnSp>
+      <p:sp>
+        <p:nvSpPr>
+          <p:cNvPr id="18" name="Rounded Rectangle 17"/>
+          <p:cNvSpPr/>
+          <p:nvPr/>
+        </p:nvSpPr>
+        <p:spPr>
+          <a:xfrm>
+            <a:off x="3822700" y="190500"/>
+            <a:ext cx="1155700" cy="431800"/>
+          </a:xfrm>
+          <a:prstGeom prst="roundRect">
+            <a:avLst>
+              <a:gd name="adj" fmla="val 1373"/>
+            </a:avLst>
+          </a:prstGeom>
+          <a:solidFill>
+            <a:srgbClr val="E5F4ED"/>
+          </a:solidFill>
+          <a:ln w="8890">
+            <a:solidFill>
+              <a:srgbClr val="19704F"/>
+            </a:solidFill>
+          </a:ln>
+          <a:effectLst/>
+        </p:spPr>
+        <p:style>
+          <a:lnRef idx="1">
+            <a:schemeClr val="accent1"/>
+          </a:lnRef>
+          <a:fillRef idx="3">
+            <a:schemeClr val="accent1"/>
+          </a:fillRef>
+          <a:effectRef idx="2">
+            <a:schemeClr val="accent1"/>
+          </a:effectRef>
+          <a:fontRef idx="minor">
+            <a:schemeClr val="lt1"/>
+          </a:fontRef>
+        </p:style>
+        <p:txBody>
+          <a:bodyPr rtlCol="0" anchor="ctr"/>
+          <a:lstStyle/>
+          <a:p>
+            <a:pPr algn="ctr"/>
+          </a:p>
+        </p:txBody>
+      </p:sp>
+      <p:sp>
+        <p:nvSpPr>
+          <p:cNvPr id="19" name="TextBox 18"/>
+          <p:cNvSpPr txBox="1"/>
+          <p:nvPr/>
+        </p:nvSpPr>
+        <p:spPr>
+          <a:xfrm>
+            <a:off x="2876550" y="252323"/>
+            <a:ext cx="3048000" cy="152400"/>
+          </a:xfrm>
+          <a:prstGeom prst="rect">
+            <a:avLst/>
+          </a:prstGeom>
+          <a:noFill/>
+        </p:spPr>
+        <p:txBody>
+          <a:bodyPr wrap="none" lIns="0" rIns="0" tIns="0" bIns="0" anchor="ctr">
+            <a:spAutoFit/>
+          </a:bodyPr>
+          <a:lstStyle/>
+          <a:p>
+            <a:pPr algn="ctr"/>
+            <a:r>
+              <a:rPr sz="500" b="0" i="0">
+                <a:solidFill>
+                  <a:srgbClr val="1C1E23"/>
+                </a:solidFill>
+                <a:latin typeface="Helvetica"/>
+              </a:rPr>
+              <a:t>Counterfactual replay bank</a:t>
+            </a:r>
+          </a:p>
+        </p:txBody>
+      </p:sp>
+      <p:sp>
+        <p:nvSpPr>
+          <p:cNvPr id="20" name="TextBox 19"/>
+          <p:cNvSpPr txBox="1"/>
+          <p:nvPr/>
+        </p:nvSpPr>
+        <p:spPr>
+          <a:xfrm>
+            <a:off x="2876550" y="339953"/>
+            <a:ext cx="3048000" cy="152400"/>
+          </a:xfrm>
+          <a:prstGeom prst="rect">
+            <a:avLst/>
+          </a:prstGeom>
+          <a:noFill/>
+        </p:spPr>
+        <p:txBody>
+          <a:bodyPr wrap="none" lIns="0" rIns="0" tIns="0" bIns="0" anchor="ctr">
+            <a:spAutoFit/>
+          </a:bodyPr>
+          <a:lstStyle/>
+          <a:p>
+            <a:pPr algn="ctr"/>
+            <a:r>
+              <a:rPr sz="500" b="0" i="0">
+                <a:solidFill>
+                  <a:srgbClr val="1C1E23"/>
+                </a:solidFill>
+                <a:latin typeface="Helvetica"/>
+              </a:rPr>
+              <a:t>B = {(z[i], a, L[i,a])}</a:t>
+            </a:r>
+          </a:p>
+        </p:txBody>
+      </p:sp>
+      <p:sp>
+        <p:nvSpPr>
+          <p:cNvPr id="21" name="TextBox 20"/>
+          <p:cNvSpPr txBox="1"/>
+          <p:nvPr/>
+        </p:nvSpPr>
+        <p:spPr>
+          <a:xfrm>
+            <a:off x="2876550" y="427583"/>
+            <a:ext cx="3048000" cy="152400"/>
+          </a:xfrm>
+          <a:prstGeom prst="rect">
+            <a:avLst/>
+          </a:prstGeom>
+          <a:noFill/>
+        </p:spPr>
+        <p:txBody>
+          <a:bodyPr wrap="none" lIns="0" rIns="0" tIns="0" bIns="0" anchor="ctr">
+            <a:spAutoFit/>
+          </a:bodyPr>
+          <a:lstStyle/>
+          <a:p>
+            <a:pPr algn="ctr"/>
+            <a:r>
+              <a:rPr sz="500" b="0" i="0">
+                <a:solidFill>
+                  <a:srgbClr val="1C1E23"/>
+                </a:solidFill>
+                <a:latin typeface="Helvetica"/>
+              </a:rPr>
+              <a:t>frozen once, read-only</a:t>
+            </a:r>
+          </a:p>
+        </p:txBody>
+      </p:sp>
+      <p:cxnSp>
+        <p:nvCxnSpPr>
+          <p:cNvPr id="22" name="Connector 21"/>
+          <p:cNvCxnSpPr/>
+          <p:nvPr/>
+        </p:nvCxnSpPr>
+        <p:spPr>
+          <a:xfrm>
+            <a:off x="50800" y="711200"/>
+            <a:ext cx="4927600" cy="0"/>
+          </a:xfrm>
+          <a:prstGeom prst="line">
+            <a:avLst/>
+          </a:prstGeom>
+          <a:ln w="8890">
+            <a:solidFill>
+              <a:srgbClr val="CCCED3"/>
+            </a:solidFill>
+            <a:prstDash val="dash"/>
+          </a:ln>
+        </p:spPr>
+        <p:style>
+          <a:lnRef idx="2">
+            <a:schemeClr val="accent1"/>
+          </a:lnRef>
+          <a:fillRef idx="0">
+            <a:schemeClr val="accent1"/>
+          </a:fillRef>
+          <a:effectRef idx="1">
+            <a:schemeClr val="accent1"/>
+          </a:effectRef>
+          <a:fontRef idx="minor">
+            <a:schemeClr val="tx1"/>
+          </a:fontRef>
+        </p:style>
+      </p:cxnSp>
+      <p:sp>
+        <p:nvSpPr>
+          <p:cNvPr id="23" name="TextBox 22"/>
+          <p:cNvSpPr txBox="1"/>
+          <p:nvPr/>
+        </p:nvSpPr>
+        <p:spPr>
+          <a:xfrm>
+            <a:off x="990600" y="685546"/>
+            <a:ext cx="3048000" cy="158496"/>
+          </a:xfrm>
+          <a:prstGeom prst="rect">
+            <a:avLst/>
+          </a:prstGeom>
+          <a:noFill/>
+        </p:spPr>
+        <p:txBody>
+          <a:bodyPr wrap="none" lIns="0" rIns="0" tIns="0" bIns="0" anchor="ctr">
+            <a:spAutoFit/>
+          </a:bodyPr>
+          <a:lstStyle/>
+          <a:p>
+            <a:pPr algn="ctr"/>
+            <a:r>
+              <a:rPr sz="520" b="0" i="0">
+                <a:solidFill>
+                  <a:srgbClr val="AD2B2B"/>
+                </a:solidFill>
+                <a:latin typeface="Helvetica"/>
+              </a:rPr>
+              <a:t>no future target crosses this line</a:t>
+            </a:r>
+          </a:p>
+        </p:txBody>
+      </p:sp>
+      <p:sp>
+        <p:nvSpPr>
+          <p:cNvPr id="24" name="TextBox 23"/>
+          <p:cNvSpPr txBox="1"/>
+          <p:nvPr/>
+        </p:nvSpPr>
+        <p:spPr>
+          <a:xfrm>
+            <a:off x="-1473200" y="811530"/>
+            <a:ext cx="3048000" cy="182879"/>
+          </a:xfrm>
+          <a:prstGeom prst="rect">
+            <a:avLst/>
+          </a:prstGeom>
+          <a:noFill/>
+        </p:spPr>
+        <p:txBody>
+          <a:bodyPr wrap="none" lIns="0" rIns="0" tIns="0" bIns="0" anchor="ctr">
+            <a:spAutoFit/>
+          </a:bodyPr>
+          <a:lstStyle/>
+          <a:p>
+            <a:pPr algn="l"/>
+            <a:r>
+              <a:rPr sz="600" b="1" i="0">
+                <a:solidFill>
+                  <a:srgbClr val="215499"/>
+                </a:solidFill>
+                <a:latin typeface="Helvetica"/>
+              </a:rPr>
+              <a:t>Online  (deployment — no future is available)</a:t>
+            </a:r>
+          </a:p>
+        </p:txBody>
+      </p:sp>
+      <p:sp>
+        <p:nvSpPr>
+          <p:cNvPr id="25" name="Rounded Rectangle 24"/>
+          <p:cNvSpPr/>
+          <p:nvPr/>
+        </p:nvSpPr>
+        <p:spPr>
+          <a:xfrm>
+            <a:off x="50800" y="990600"/>
+            <a:ext cx="1155700" cy="431800"/>
+          </a:xfrm>
+          <a:prstGeom prst="roundRect">
+            <a:avLst>
+              <a:gd name="adj" fmla="val 1373"/>
+            </a:avLst>
+          </a:prstGeom>
+          <a:solidFill>
+            <a:srgbClr val="FFFFFF"/>
+          </a:solidFill>
+          <a:ln w="8890">
+            <a:solidFill>
+              <a:srgbClr val="CCCED3"/>
+            </a:solidFill>
+          </a:ln>
+          <a:effectLst/>
+        </p:spPr>
+        <p:style>
+          <a:lnRef idx="1">
+            <a:schemeClr val="accent1"/>
+          </a:lnRef>
+          <a:fillRef idx="3">
+            <a:schemeClr val="accent1"/>
+          </a:fillRef>
+          <a:effectRef idx="2">
+            <a:schemeClr val="accent1"/>
+          </a:effectRef>
+          <a:fontRef idx="minor">
+            <a:schemeClr val="lt1"/>
+          </a:fontRef>
+        </p:style>
+        <p:txBody>
+          <a:bodyPr rtlCol="0" anchor="ctr"/>
+          <a:lstStyle/>
+          <a:p>
+            <a:pPr algn="ctr"/>
+          </a:p>
+        </p:txBody>
+      </p:sp>
+      <p:sp>
+        <p:nvSpPr>
+          <p:cNvPr id="26" name="TextBox 25"/>
+          <p:cNvSpPr txBox="1"/>
+          <p:nvPr/>
+        </p:nvSpPr>
+        <p:spPr>
+          <a:xfrm>
+            <a:off x="-895350" y="1052423"/>
+            <a:ext cx="3048000" cy="152400"/>
+          </a:xfrm>
+          <a:prstGeom prst="rect">
+            <a:avLst/>
+          </a:prstGeom>
+          <a:noFill/>
+        </p:spPr>
+        <p:txBody>
+          <a:bodyPr wrap="none" lIns="0" rIns="0" tIns="0" bIns="0" anchor="ctr">
+            <a:spAutoFit/>
+          </a:bodyPr>
+          <a:lstStyle/>
+          <a:p>
+            <a:pPr algn="ctr"/>
+            <a:r>
+              <a:rPr sz="500" b="0" i="0">
+                <a:solidFill>
+                  <a:srgbClr val="1C1E23"/>
+                </a:solidFill>
+                <a:latin typeface="Helvetica"/>
+              </a:rPr>
+              <a:t>Incomplete context</a:t>
+            </a:r>
+          </a:p>
+        </p:txBody>
+      </p:sp>
+      <p:sp>
+        <p:nvSpPr>
+          <p:cNvPr id="27" name="TextBox 26"/>
+          <p:cNvSpPr txBox="1"/>
+          <p:nvPr/>
+        </p:nvSpPr>
+        <p:spPr>
+          <a:xfrm>
+            <a:off x="-895350" y="1140053"/>
+            <a:ext cx="3048000" cy="152400"/>
+          </a:xfrm>
+          <a:prstGeom prst="rect">
+            <a:avLst/>
+          </a:prstGeom>
+          <a:noFill/>
+        </p:spPr>
+        <p:txBody>
+          <a:bodyPr wrap="none" lIns="0" rIns="0" tIns="0" bIns="0" anchor="ctr">
+            <a:spAutoFit/>
+          </a:bodyPr>
+          <a:lstStyle/>
+          <a:p>
+            <a:pPr algn="ctr"/>
+            <a:r>
+              <a:rPr sz="500" b="0" i="0">
+                <a:solidFill>
+                  <a:srgbClr val="1C1E23"/>
+                </a:solidFill>
+                <a:latin typeface="Helvetica"/>
+              </a:rPr>
+              <a:t>(X, M) at the</a:t>
+            </a:r>
+          </a:p>
+        </p:txBody>
+      </p:sp>
+      <p:sp>
+        <p:nvSpPr>
+          <p:cNvPr id="28" name="TextBox 27"/>
+          <p:cNvSpPr txBox="1"/>
+          <p:nvPr/>
+        </p:nvSpPr>
+        <p:spPr>
+          <a:xfrm>
+            <a:off x="-895350" y="1227683"/>
+            <a:ext cx="3048000" cy="152400"/>
+          </a:xfrm>
+          <a:prstGeom prst="rect">
+            <a:avLst/>
+          </a:prstGeom>
+          <a:noFill/>
+        </p:spPr>
+        <p:txBody>
+          <a:bodyPr wrap="none" lIns="0" rIns="0" tIns="0" bIns="0" anchor="ctr">
+            <a:spAutoFit/>
+          </a:bodyPr>
+          <a:lstStyle/>
+          <a:p>
+            <a:pPr algn="ctr"/>
+            <a:r>
+              <a:rPr sz="500" b="0" i="0">
+                <a:solidFill>
+                  <a:srgbClr val="1C1E23"/>
+                </a:solidFill>
+                <a:latin typeface="Helvetica"/>
+              </a:rPr>
+              <a:t>forecast origin</a:t>
+            </a:r>
+          </a:p>
+        </p:txBody>
+      </p:sp>
+      <p:cxnSp>
+        <p:nvCxnSpPr>
+          <p:cNvPr id="29" name="Connector 28"/>
+          <p:cNvCxnSpPr/>
+          <p:nvPr/>
+        </p:nvCxnSpPr>
+        <p:spPr>
+          <a:xfrm>
+            <a:off x="1212850" y="1206500"/>
+            <a:ext cx="88900" cy="0"/>
+          </a:xfrm>
+          <a:prstGeom prst="bentConnector3">
+            <a:avLst/>
+          </a:prstGeom>
+          <a:ln w="11430">
+            <a:solidFill>
+              <a:srgbClr val="1C1E23"/>
+            </a:solidFill>
+          </a:ln>
+        </p:spPr>
+        <p:style>
+          <a:lnRef idx="2">
+            <a:schemeClr val="accent1"/>
+          </a:lnRef>
+          <a:fillRef idx="0">
+            <a:schemeClr val="accent1"/>
+          </a:fillRef>
+          <a:effectRef idx="1">
+            <a:schemeClr val="accent1"/>
+          </a:effectRef>
+          <a:fontRef idx="minor">
+            <a:schemeClr val="tx1"/>
+          </a:fontRef>
+        </p:style>
+      </p:cxnSp>
+      <p:sp>
+        <p:nvSpPr>
+          <p:cNvPr id="30" name="Rounded Rectangle 29"/>
+          <p:cNvSpPr/>
+          <p:nvPr/>
+        </p:nvSpPr>
+        <p:spPr>
+          <a:xfrm>
+            <a:off x="1308100" y="990600"/>
+            <a:ext cx="1155700" cy="431800"/>
+          </a:xfrm>
+          <a:prstGeom prst="roundRect">
+            <a:avLst>
+              <a:gd name="adj" fmla="val 1373"/>
+            </a:avLst>
+          </a:prstGeom>
+          <a:solidFill>
+            <a:srgbClr val="FFFFFF"/>
+          </a:solidFill>
+          <a:ln w="8890">
+            <a:solidFill>
+              <a:srgbClr val="CCCED3"/>
+            </a:solidFill>
+          </a:ln>
+          <a:effectLst/>
+        </p:spPr>
+        <p:style>
+          <a:lnRef idx="1">
+            <a:schemeClr val="accent1"/>
+          </a:lnRef>
+          <a:fillRef idx="3">
+            <a:schemeClr val="accent1"/>
+          </a:fillRef>
+          <a:effectRef idx="2">
+            <a:schemeClr val="accent1"/>
+          </a:effectRef>
+          <a:fontRef idx="minor">
+            <a:schemeClr val="lt1"/>
+          </a:fontRef>
+        </p:style>
+        <p:txBody>
+          <a:bodyPr rtlCol="0" anchor="ctr"/>
+          <a:lstStyle/>
+          <a:p>
+            <a:pPr algn="ctr"/>
+          </a:p>
+        </p:txBody>
+      </p:sp>
+      <p:sp>
+        <p:nvSpPr>
+          <p:cNvPr id="31" name="TextBox 30"/>
+          <p:cNvSpPr txBox="1"/>
+          <p:nvPr/>
+        </p:nvSpPr>
+        <p:spPr>
+          <a:xfrm>
+            <a:off x="361950" y="1052423"/>
+            <a:ext cx="3048000" cy="152400"/>
+          </a:xfrm>
+          <a:prstGeom prst="rect">
+            <a:avLst/>
+          </a:prstGeom>
+          <a:noFill/>
+        </p:spPr>
+        <p:txBody>
+          <a:bodyPr wrap="none" lIns="0" rIns="0" tIns="0" bIns="0" anchor="ctr">
+            <a:spAutoFit/>
+          </a:bodyPr>
+          <a:lstStyle/>
+          <a:p>
+            <a:pPr algn="ctr"/>
+            <a:r>
+              <a:rPr sz="500" b="0" i="0">
+                <a:solidFill>
+                  <a:srgbClr val="1C1E23"/>
+                </a:solidFill>
+                <a:latin typeface="Helvetica"/>
+              </a:rPr>
+              <a:t>Observable state z</a:t>
+            </a:r>
+          </a:p>
+        </p:txBody>
+      </p:sp>
+      <p:sp>
+        <p:nvSpPr>
+          <p:cNvPr id="32" name="TextBox 31"/>
+          <p:cNvSpPr txBox="1"/>
+          <p:nvPr/>
+        </p:nvSpPr>
+        <p:spPr>
+          <a:xfrm>
+            <a:off x="361950" y="1140053"/>
+            <a:ext cx="3048000" cy="152400"/>
+          </a:xfrm>
+          <a:prstGeom prst="rect">
+            <a:avLst/>
+          </a:prstGeom>
+          <a:noFill/>
+        </p:spPr>
+        <p:txBody>
+          <a:bodyPr wrap="none" lIns="0" rIns="0" tIns="0" bIns="0" anchor="ctr">
+            <a:spAutoFit/>
+          </a:bodyPr>
+          <a:lstStyle/>
+          <a:p>
+            <a:pPr algn="ctr"/>
+            <a:r>
+              <a:rPr sz="500" b="0" i="0">
+                <a:solidFill>
+                  <a:srgbClr val="1C1E23"/>
+                </a:solidFill>
+                <a:latin typeface="Helvetica"/>
+              </a:rPr>
+              <a:t>episode + intervention</a:t>
+            </a:r>
+          </a:p>
+        </p:txBody>
+      </p:sp>
+      <p:sp>
+        <p:nvSpPr>
+          <p:cNvPr id="33" name="TextBox 32"/>
+          <p:cNvSpPr txBox="1"/>
+          <p:nvPr/>
+        </p:nvSpPr>
+        <p:spPr>
+          <a:xfrm>
+            <a:off x="361950" y="1227683"/>
+            <a:ext cx="3048000" cy="152400"/>
+          </a:xfrm>
+          <a:prstGeom prst="rect">
+            <a:avLst/>
+          </a:prstGeom>
+          <a:noFill/>
+        </p:spPr>
+        <p:txBody>
+          <a:bodyPr wrap="none" lIns="0" rIns="0" tIns="0" bIns="0" anchor="ctr">
+            <a:spAutoFit/>
+          </a:bodyPr>
+          <a:lstStyle/>
+          <a:p>
+            <a:pPr algn="ctr"/>
+            <a:r>
+              <a:rPr sz="500" b="0" i="0">
+                <a:solidFill>
+                  <a:srgbClr val="1C1E23"/>
+                </a:solidFill>
+                <a:latin typeface="Helvetica"/>
+              </a:rPr>
+              <a:t>state; no forecast read</a:t>
+            </a:r>
+          </a:p>
+        </p:txBody>
+      </p:sp>
+      <p:cxnSp>
+        <p:nvCxnSpPr>
+          <p:cNvPr id="34" name="Connector 33"/>
+          <p:cNvCxnSpPr/>
+          <p:nvPr/>
+        </p:nvCxnSpPr>
+        <p:spPr>
+          <a:xfrm>
+            <a:off x="2470150" y="1206500"/>
+            <a:ext cx="88900" cy="0"/>
+          </a:xfrm>
+          <a:prstGeom prst="bentConnector3">
+            <a:avLst/>
+          </a:prstGeom>
+          <a:ln w="11430">
+            <a:solidFill>
+              <a:srgbClr val="1C1E23"/>
+            </a:solidFill>
+          </a:ln>
+        </p:spPr>
+        <p:style>
+          <a:lnRef idx="2">
+            <a:schemeClr val="accent1"/>
+          </a:lnRef>
+          <a:fillRef idx="0">
+            <a:schemeClr val="accent1"/>
+          </a:fillRef>
+          <a:effectRef idx="1">
+            <a:schemeClr val="accent1"/>
+          </a:effectRef>
+          <a:fontRef idx="minor">
+            <a:schemeClr val="tx1"/>
+          </a:fontRef>
+        </p:style>
+      </p:cxnSp>
+      <p:sp>
+        <p:nvSpPr>
+          <p:cNvPr id="35" name="Rounded Rectangle 34"/>
+          <p:cNvSpPr/>
+          <p:nvPr/>
+        </p:nvSpPr>
+        <p:spPr>
+          <a:xfrm>
+            <a:off x="2565400" y="990600"/>
+            <a:ext cx="1155700" cy="431800"/>
+          </a:xfrm>
+          <a:prstGeom prst="roundRect">
+            <a:avLst>
+              <a:gd name="adj" fmla="val 1373"/>
             </a:avLst>
           </a:prstGeom>
           <a:solidFill>
@@ -3326,14 +4372,14 @@
       </p:sp>
       <p:sp>
         <p:nvSpPr>
-          <p:cNvPr id="8" name="TextBox 7"/>
+          <p:cNvPr id="36" name="TextBox 35"/>
           <p:cNvSpPr txBox="1"/>
           <p:nvPr/>
         </p:nvSpPr>
         <p:spPr>
           <a:xfrm>
-            <a:off x="609600" y="203377"/>
-            <a:ext cx="3048000" cy="176784"/>
+            <a:off x="1619250" y="1052423"/>
+            <a:ext cx="3048000" cy="152400"/>
           </a:xfrm>
           <a:prstGeom prst="rect">
             <a:avLst/>
@@ -3348,27 +4394,27 @@
           <a:p>
             <a:pPr algn="ctr"/>
             <a:r>
-              <a:rPr sz="580" b="0" i="0">
+              <a:rPr sz="500" b="0" i="0">
                 <a:solidFill>
                   <a:srgbClr val="1C1E23"/>
                 </a:solidFill>
                 <a:latin typeface="Helvetica"/>
               </a:rPr>
-              <a:t>Materialise legal</a:t>
-            </a:r>
-          </a:p>
-        </p:txBody>
-      </p:sp>
-      <p:sp>
-        <p:nvSpPr>
-          <p:cNvPr id="9" name="TextBox 8"/>
+              <a:t>Regret-aware scoring</a:t>
+            </a:r>
+          </a:p>
+        </p:txBody>
+      </p:sp>
+      <p:sp>
+        <p:nvSpPr>
+          <p:cNvPr id="37" name="TextBox 36"/>
           <p:cNvSpPr txBox="1"/>
           <p:nvPr/>
         </p:nvSpPr>
         <p:spPr>
           <a:xfrm>
-            <a:off x="609600" y="301167"/>
-            <a:ext cx="3048000" cy="176784"/>
+            <a:off x="1619250" y="1140053"/>
+            <a:ext cx="3048000" cy="152400"/>
           </a:xfrm>
           <a:prstGeom prst="rect">
             <a:avLst/>
@@ -3383,27 +4429,62 @@
           <a:p>
             <a:pPr algn="ctr"/>
             <a:r>
-              <a:rPr sz="580" b="0" i="0">
+              <a:rPr sz="500" b="0" i="0">
                 <a:solidFill>
                   <a:srgbClr val="1C1E23"/>
                 </a:solidFill>
                 <a:latin typeface="Helvetica"/>
               </a:rPr>
-              <a:t>candidate versions</a:t>
+              <a:t>S[a] over the frozen bank;</a:t>
+            </a:r>
+          </a:p>
+        </p:txBody>
+      </p:sp>
+      <p:sp>
+        <p:nvSpPr>
+          <p:cNvPr id="38" name="TextBox 37"/>
+          <p:cNvSpPr txBox="1"/>
+          <p:nvPr/>
+        </p:nvSpPr>
+        <p:spPr>
+          <a:xfrm>
+            <a:off x="1619250" y="1227683"/>
+            <a:ext cx="3048000" cy="152400"/>
+          </a:xfrm>
+          <a:prstGeom prst="rect">
+            <a:avLst/>
+          </a:prstGeom>
+          <a:noFill/>
+        </p:spPr>
+        <p:txBody>
+          <a:bodyPr wrap="none" lIns="0" rIns="0" tIns="0" bIns="0" anchor="ctr">
+            <a:spAutoFit/>
+          </a:bodyPr>
+          <a:lstStyle/>
+          <a:p>
+            <a:pPr algn="ctr"/>
+            <a:r>
+              <a:rPr sz="500" b="0" i="0">
+                <a:solidFill>
+                  <a:srgbClr val="1C1E23"/>
+                </a:solidFill>
+                <a:latin typeface="Helvetica"/>
+              </a:rPr>
+              <a:t>a* = argmax S[a]</a:t>
             </a:r>
           </a:p>
         </p:txBody>
       </p:sp>
       <p:cxnSp>
         <p:nvCxnSpPr>
-          <p:cNvPr id="10" name="Connector 9"/>
+          <p:cNvPr id="39" name="Connector 38"/>
           <p:cNvCxnSpPr/>
           <p:nvPr/>
         </p:nvCxnSpPr>
         <p:spPr>
           <a:xfrm>
-            <a:off x="2832100" y="330200"/>
-            <a:ext cx="152400" cy="0"/>
+            <a:off x="3727450" y="1206500"/>
+            <a:ext cx="88900" cy="0"/>
           </a:xfrm>
           <a:prstGeom prst="bentConnector3">
             <a:avLst/>
@@ -3431,22 +4512,22 @@
       </p:cxnSp>
       <p:sp>
         <p:nvSpPr>
-          <p:cNvPr id="11" name="Rounded Rectangle 10"/>
+          <p:cNvPr id="40" name="Rounded Rectangle 39"/>
           <p:cNvSpPr/>
           <p:nvPr/>
         </p:nvSpPr>
         <p:spPr>
           <a:xfrm>
-            <a:off x="2997200" y="177800"/>
-            <a:ext cx="1981200" cy="304800"/>
+            <a:off x="3822700" y="990600"/>
+            <a:ext cx="1155700" cy="431800"/>
           </a:xfrm>
           <a:prstGeom prst="roundRect">
             <a:avLst>
-              <a:gd name="adj" fmla="val 801"/>
+              <a:gd name="adj" fmla="val 1373"/>
             </a:avLst>
           </a:prstGeom>
           <a:solidFill>
-            <a:srgbClr val="F0F0F3"/>
+            <a:srgbClr val="FFFFFF"/>
           </a:solidFill>
           <a:ln w="8890">
             <a:solidFill>
@@ -3479,14 +4560,14 @@
       </p:sp>
       <p:sp>
         <p:nvSpPr>
-          <p:cNvPr id="12" name="TextBox 11"/>
+          <p:cNvPr id="41" name="TextBox 40"/>
           <p:cNvSpPr txBox="1"/>
           <p:nvPr/>
         </p:nvSpPr>
         <p:spPr>
           <a:xfrm>
-            <a:off x="2463800" y="203377"/>
-            <a:ext cx="3048000" cy="176784"/>
+            <a:off x="2876550" y="1052423"/>
+            <a:ext cx="3048000" cy="152400"/>
           </a:xfrm>
           <a:prstGeom prst="rect">
             <a:avLst/>
@@ -3501,27 +4582,27 @@
           <a:p>
             <a:pPr algn="ctr"/>
             <a:r>
-              <a:rPr sz="580" b="0" i="0">
+              <a:rPr sz="500" b="0" i="0">
                 <a:solidFill>
                   <a:srgbClr val="1C1E23"/>
                 </a:solidFill>
                 <a:latin typeface="Helvetica"/>
               </a:rPr>
-              <a:t>Reference forecast only</a:t>
-            </a:r>
-          </a:p>
-        </p:txBody>
-      </p:sp>
-      <p:sp>
-        <p:nvSpPr>
-          <p:cNvPr id="13" name="TextBox 12"/>
+              <a:t>Frozen TSFM, one call</a:t>
+            </a:r>
+          </a:p>
+        </p:txBody>
+      </p:sp>
+      <p:sp>
+        <p:nvSpPr>
+          <p:cNvPr id="42" name="TextBox 41"/>
           <p:cNvSpPr txBox="1"/>
           <p:nvPr/>
         </p:nvSpPr>
         <p:spPr>
           <a:xfrm>
-            <a:off x="2463800" y="301167"/>
-            <a:ext cx="3048000" cy="176784"/>
+            <a:off x="2876550" y="1140053"/>
+            <a:ext cx="3048000" cy="152400"/>
           </a:xfrm>
           <a:prstGeom prst="rect">
             <a:avLst/>
@@ -3536,27 +4617,62 @@
           <a:p>
             <a:pPr algn="ctr"/>
             <a:r>
-              <a:rPr sz="580" b="0" i="0">
+              <a:rPr sz="500" b="0" i="0">
                 <a:solidFill>
                   <a:srgbClr val="1C1E23"/>
                 </a:solidFill>
                 <a:latin typeface="Helvetica"/>
               </a:rPr>
-              <a:t>p0 = F(X[a0])</a:t>
-            </a:r>
-          </a:p>
-        </p:txBody>
-      </p:sp>
-      <p:sp>
-        <p:nvSpPr>
-          <p:cNvPr id="14" name="Rounded Rectangle 13"/>
+              <a:t>F(X[a*]) is returned;</a:t>
+            </a:r>
+          </a:p>
+        </p:txBody>
+      </p:sp>
+      <p:sp>
+        <p:nvSpPr>
+          <p:cNvPr id="43" name="TextBox 42"/>
+          <p:cNvSpPr txBox="1"/>
+          <p:nvPr/>
+        </p:nvSpPr>
+        <p:spPr>
+          <a:xfrm>
+            <a:off x="2876550" y="1227683"/>
+            <a:ext cx="3048000" cy="152400"/>
+          </a:xfrm>
+          <a:prstGeom prst="rect">
+            <a:avLst/>
+          </a:prstGeom>
+          <a:noFill/>
+        </p:spPr>
+        <p:txBody>
+          <a:bodyPr wrap="none" lIns="0" rIns="0" tIns="0" bIns="0" anchor="ctr">
+            <a:spAutoFit/>
+          </a:bodyPr>
+          <a:lstStyle/>
+          <a:p>
+            <a:pPr algn="ctr"/>
+            <a:r>
+              <a:rPr sz="500" b="0" i="0">
+                <a:solidFill>
+                  <a:srgbClr val="1C1E23"/>
+                </a:solidFill>
+                <a:latin typeface="Helvetica"/>
+              </a:rPr>
+              <a:t>KEEP is one of the arms</a:t>
+            </a:r>
+          </a:p>
+        </p:txBody>
+      </p:sp>
+      <p:sp>
+        <p:nvSpPr>
+          <p:cNvPr id="44" name="Rounded Rectangle 43"/>
           <p:cNvSpPr/>
           <p:nvPr/>
         </p:nvSpPr>
         <p:spPr>
           <a:xfrm>
-            <a:off x="50800" y="584200"/>
-            <a:ext cx="939800" cy="190500"/>
+            <a:off x="50800" y="1524000"/>
+            <a:ext cx="939800" cy="177800"/>
           </a:xfrm>
           <a:prstGeom prst="roundRect">
             <a:avLst>
@@ -3597,14 +4713,14 @@
       </p:sp>
       <p:sp>
         <p:nvSpPr>
-          <p:cNvPr id="15" name="TextBox 14"/>
+          <p:cNvPr id="45" name="TextBox 44"/>
           <p:cNvSpPr txBox="1"/>
           <p:nvPr/>
         </p:nvSpPr>
         <p:spPr>
           <a:xfrm>
-            <a:off x="-1003300" y="607618"/>
-            <a:ext cx="3048000" cy="170688"/>
+            <a:off x="-1003300" y="1543634"/>
+            <a:ext cx="3048000" cy="164592"/>
           </a:xfrm>
           <a:prstGeom prst="rect">
             <a:avLst/>
@@ -3619,7 +4735,7 @@
           <a:p>
             <a:pPr algn="ctr"/>
             <a:r>
-              <a:rPr sz="560" b="0" i="0">
+              <a:rPr sz="540" b="0" i="0">
                 <a:solidFill>
                   <a:srgbClr val="1C1E23"/>
                 </a:solidFill>
@@ -3632,14 +4748,14 @@
       </p:sp>
       <p:sp>
         <p:nvSpPr>
-          <p:cNvPr id="16" name="Rounded Rectangle 15"/>
+          <p:cNvPr id="46" name="Rounded Rectangle 45"/>
           <p:cNvSpPr/>
           <p:nvPr/>
         </p:nvSpPr>
         <p:spPr>
           <a:xfrm>
-            <a:off x="1041400" y="584200"/>
-            <a:ext cx="939800" cy="190500"/>
+            <a:off x="1041400" y="1524000"/>
+            <a:ext cx="939800" cy="177800"/>
           </a:xfrm>
           <a:prstGeom prst="roundRect">
             <a:avLst>
@@ -3680,14 +4796,14 @@
       </p:sp>
       <p:sp>
         <p:nvSpPr>
-          <p:cNvPr id="17" name="TextBox 16"/>
+          <p:cNvPr id="47" name="TextBox 46"/>
           <p:cNvSpPr txBox="1"/>
           <p:nvPr/>
         </p:nvSpPr>
         <p:spPr>
           <a:xfrm>
-            <a:off x="-12700" y="607618"/>
-            <a:ext cx="3048000" cy="170688"/>
+            <a:off x="-12700" y="1543634"/>
+            <a:ext cx="3048000" cy="164592"/>
           </a:xfrm>
           <a:prstGeom prst="rect">
             <a:avLst/>
@@ -3702,7 +4818,7 @@
           <a:p>
             <a:pPr algn="ctr"/>
             <a:r>
-              <a:rPr sz="560" b="0" i="0">
+              <a:rPr sz="540" b="0" i="0">
                 <a:solidFill>
                   <a:srgbClr val="1C1E23"/>
                 </a:solidFill>
@@ -3715,14 +4831,14 @@
       </p:sp>
       <p:sp>
         <p:nvSpPr>
-          <p:cNvPr id="18" name="Rounded Rectangle 17"/>
+          <p:cNvPr id="48" name="Rounded Rectangle 47"/>
           <p:cNvSpPr/>
           <p:nvPr/>
         </p:nvSpPr>
         <p:spPr>
           <a:xfrm>
-            <a:off x="2032000" y="584200"/>
-            <a:ext cx="939800" cy="190500"/>
+            <a:off x="2032000" y="1524000"/>
+            <a:ext cx="939800" cy="177800"/>
           </a:xfrm>
           <a:prstGeom prst="roundRect">
             <a:avLst>
@@ -3763,14 +4879,14 @@
       </p:sp>
       <p:sp>
         <p:nvSpPr>
-          <p:cNvPr id="19" name="TextBox 18"/>
+          <p:cNvPr id="49" name="TextBox 48"/>
           <p:cNvSpPr txBox="1"/>
           <p:nvPr/>
         </p:nvSpPr>
         <p:spPr>
           <a:xfrm>
-            <a:off x="977900" y="607618"/>
-            <a:ext cx="3048000" cy="170688"/>
+            <a:off x="977900" y="1543634"/>
+            <a:ext cx="3048000" cy="164592"/>
           </a:xfrm>
           <a:prstGeom prst="rect">
             <a:avLst/>
@@ -3785,7 +4901,7 @@
           <a:p>
             <a:pPr algn="ctr"/>
             <a:r>
-              <a:rPr sz="560" b="0" i="0">
+              <a:rPr sz="540" b="0" i="0">
                 <a:solidFill>
                   <a:srgbClr val="1C1E23"/>
                 </a:solidFill>
@@ -3798,14 +4914,14 @@
       </p:sp>
       <p:sp>
         <p:nvSpPr>
-          <p:cNvPr id="20" name="Rounded Rectangle 19"/>
+          <p:cNvPr id="50" name="Rounded Rectangle 49"/>
           <p:cNvSpPr/>
           <p:nvPr/>
         </p:nvSpPr>
         <p:spPr>
           <a:xfrm>
-            <a:off x="3022600" y="584200"/>
-            <a:ext cx="939800" cy="190500"/>
+            <a:off x="3022600" y="1524000"/>
+            <a:ext cx="939800" cy="177800"/>
           </a:xfrm>
           <a:prstGeom prst="roundRect">
             <a:avLst>
@@ -3846,14 +4962,14 @@
       </p:sp>
       <p:sp>
         <p:nvSpPr>
-          <p:cNvPr id="21" name="TextBox 20"/>
+          <p:cNvPr id="51" name="TextBox 50"/>
           <p:cNvSpPr txBox="1"/>
           <p:nvPr/>
         </p:nvSpPr>
         <p:spPr>
           <a:xfrm>
-            <a:off x="1968500" y="607618"/>
-            <a:ext cx="3048000" cy="170688"/>
+            <a:off x="1968500" y="1543634"/>
+            <a:ext cx="3048000" cy="164592"/>
           </a:xfrm>
           <a:prstGeom prst="rect">
             <a:avLst/>
@@ -3868,7 +4984,7 @@
           <a:p>
             <a:pPr algn="ctr"/>
             <a:r>
-              <a:rPr sz="560" b="0" i="0">
+              <a:rPr sz="540" b="0" i="0">
                 <a:solidFill>
                   <a:srgbClr val="1C1E23"/>
                 </a:solidFill>
@@ -3881,14 +4997,14 @@
       </p:sp>
       <p:sp>
         <p:nvSpPr>
-          <p:cNvPr id="22" name="Rounded Rectangle 21"/>
+          <p:cNvPr id="52" name="Rounded Rectangle 51"/>
           <p:cNvSpPr/>
           <p:nvPr/>
         </p:nvSpPr>
         <p:spPr>
           <a:xfrm>
-            <a:off x="4013200" y="584200"/>
-            <a:ext cx="939800" cy="190500"/>
+            <a:off x="4013200" y="1524000"/>
+            <a:ext cx="939800" cy="177800"/>
           </a:xfrm>
           <a:prstGeom prst="roundRect">
             <a:avLst>
@@ -3929,14 +5045,14 @@
       </p:sp>
       <p:sp>
         <p:nvSpPr>
-          <p:cNvPr id="23" name="TextBox 22"/>
+          <p:cNvPr id="53" name="TextBox 52"/>
           <p:cNvSpPr txBox="1"/>
           <p:nvPr/>
         </p:nvSpPr>
         <p:spPr>
           <a:xfrm>
-            <a:off x="2959100" y="607618"/>
-            <a:ext cx="3048000" cy="170688"/>
+            <a:off x="2959100" y="1543634"/>
+            <a:ext cx="3048000" cy="164592"/>
           </a:xfrm>
           <a:prstGeom prst="rect">
             <a:avLst/>
@@ -3951,7 +5067,7 @@
           <a:p>
             <a:pPr algn="ctr"/>
             <a:r>
-              <a:rPr sz="560" b="0" i="0">
+              <a:rPr sz="540" b="0" i="0">
                 <a:solidFill>
                   <a:srgbClr val="1C1E23"/>
                 </a:solidFill>
@@ -3964,14 +5080,14 @@
       </p:sp>
       <p:sp>
         <p:nvSpPr>
-          <p:cNvPr id="24" name="TextBox 23"/>
+          <p:cNvPr id="54" name="TextBox 53"/>
           <p:cNvSpPr txBox="1"/>
           <p:nvPr/>
         </p:nvSpPr>
         <p:spPr>
           <a:xfrm>
-            <a:off x="-1473200" y="780796"/>
-            <a:ext cx="3048000" cy="158496"/>
+            <a:off x="-1473200" y="1717675"/>
+            <a:ext cx="3048000" cy="152400"/>
           </a:xfrm>
           <a:prstGeom prst="rect">
             <a:avLst/>
@@ -3986,37 +5102,37 @@
           <a:p>
             <a:pPr algn="l"/>
             <a:r>
-              <a:rPr sz="520" b="0" i="0">
+              <a:rPr sz="500" b="0" i="0">
                 <a:solidFill>
                   <a:srgbClr val="6B727C"/>
                 </a:solidFill>
                 <a:latin typeface="Helvetica"/>
               </a:rPr>
-              <a:t>action catalog  A = {KEEP, FFILL, Single TS-ICL, Multi TS-ICL, Context Ridge}: fixed, never enlarged</a:t>
-            </a:r>
-          </a:p>
-        </p:txBody>
-      </p:sp>
-      <p:sp>
-        <p:nvSpPr>
-          <p:cNvPr id="25" name="Rounded Rectangle 24"/>
+              <a:t>action catalog A: fixed and closed; KEEP is a normal arm, not an exception path</a:t>
+            </a:r>
+          </a:p>
+        </p:txBody>
+      </p:sp>
+      <p:sp>
+        <p:nvSpPr>
+          <p:cNvPr id="55" name="Rounded Rectangle 54"/>
           <p:cNvSpPr/>
           <p:nvPr/>
         </p:nvSpPr>
         <p:spPr>
           <a:xfrm>
-            <a:off x="50800" y="965200"/>
-            <a:ext cx="2565400" cy="939800"/>
+            <a:off x="50800" y="1905000"/>
+            <a:ext cx="4927600" cy="431800"/>
           </a:xfrm>
           <a:prstGeom prst="roundRect">
             <a:avLst>
-              <a:gd name="adj" fmla="val 618"/>
+              <a:gd name="adj" fmla="val 322"/>
             </a:avLst>
           </a:prstGeom>
           <a:solidFill>
-            <a:srgbClr val="FFFFFF"/>
+            <a:srgbClr val="F0F0F3"/>
           </a:solidFill>
-          <a:ln w="8890">
+          <a:ln w="7620">
             <a:solidFill>
               <a:srgbClr val="CCCED3"/>
             </a:solidFill>
@@ -4047,14 +5163,14 @@
       </p:sp>
       <p:sp>
         <p:nvSpPr>
-          <p:cNvPr id="26" name="TextBox 25"/>
+          <p:cNvPr id="56" name="TextBox 55"/>
           <p:cNvSpPr txBox="1"/>
           <p:nvPr/>
         </p:nvSpPr>
         <p:spPr>
           <a:xfrm>
-            <a:off x="-1397000" y="982980"/>
-            <a:ext cx="3048000" cy="182879"/>
+            <a:off x="-1397000" y="1926717"/>
+            <a:ext cx="3048000" cy="164592"/>
           </a:xfrm>
           <a:prstGeom prst="rect">
             <a:avLst/>
@@ -4069,27 +5185,27 @@
           <a:p>
             <a:pPr algn="l"/>
             <a:r>
-              <a:rPr sz="600" b="1" i="0">
-                <a:solidFill>
-                  <a:srgbClr val="1C1E23"/>
+              <a:rPr sz="540" b="1" i="0">
+                <a:solidFill>
+                  <a:srgbClr val="215499"/>
                 </a:solidFill>
                 <a:latin typeface="Helvetica"/>
               </a:rPr>
-              <a:t>Observable task state  z  (no deep encoder)</a:t>
-            </a:r>
-          </a:p>
-        </p:txBody>
-      </p:sp>
-      <p:sp>
-        <p:nvSpPr>
-          <p:cNvPr id="27" name="TextBox 26"/>
+              <a:t>Episode state</a:t>
+            </a:r>
+          </a:p>
+        </p:txBody>
+      </p:sp>
+      <p:sp>
+        <p:nvSpPr>
+          <p:cNvPr id="57" name="TextBox 56"/>
           <p:cNvSpPr txBox="1"/>
           <p:nvPr/>
         </p:nvSpPr>
         <p:spPr>
           <a:xfrm>
-            <a:off x="-1397000" y="1105852"/>
-            <a:ext cx="3048000" cy="167640"/>
+            <a:off x="-660400" y="1933575"/>
+            <a:ext cx="3048000" cy="152400"/>
           </a:xfrm>
           <a:prstGeom prst="rect">
             <a:avLst/>
@@ -4104,27 +5220,27 @@
           <a:p>
             <a:pPr algn="l"/>
             <a:r>
-              <a:rPr sz="550" b="1" i="0">
-                <a:solidFill>
-                  <a:srgbClr val="215499"/>
+              <a:rPr sz="500" b="0" i="0">
+                <a:solidFill>
+                  <a:srgbClr val="6B727C"/>
                 </a:solidFill>
                 <a:latin typeface="Helvetica"/>
               </a:rPr>
-              <a:t>A  Mask state</a:t>
-            </a:r>
-          </a:p>
-        </p:txBody>
-      </p:sp>
-      <p:sp>
-        <p:nvSpPr>
-          <p:cNvPr id="28" name="TextBox 27"/>
+              <a:t>missing ratio, run structure, distance to origin, pattern, visible-context summary</a:t>
+            </a:r>
+          </a:p>
+        </p:txBody>
+      </p:sp>
+      <p:sp>
+        <p:nvSpPr>
+          <p:cNvPr id="58" name="TextBox 57"/>
           <p:cNvSpPr txBox="1"/>
           <p:nvPr/>
         </p:nvSpPr>
         <p:spPr>
           <a:xfrm>
-            <a:off x="-558800" y="1114425"/>
-            <a:ext cx="3048000" cy="152400"/>
+            <a:off x="-1397000" y="2091817"/>
+            <a:ext cx="3048000" cy="164592"/>
           </a:xfrm>
           <a:prstGeom prst="rect">
             <a:avLst/>
@@ -4139,27 +5255,27 @@
           <a:p>
             <a:pPr algn="l"/>
             <a:r>
-              <a:rPr sz="500" b="0" i="0">
-                <a:solidFill>
-                  <a:srgbClr val="6B727C"/>
+              <a:rPr sz="540" b="1" i="0">
+                <a:solidFill>
+                  <a:srgbClr val="215499"/>
                 </a:solidFill>
                 <a:latin typeface="Helvetica"/>
               </a:rPr>
-              <a:t>ratio, longest run, #runs, tail flag</a:t>
-            </a:r>
-          </a:p>
-        </p:txBody>
-      </p:sp>
-      <p:sp>
-        <p:nvSpPr>
-          <p:cNvPr id="29" name="TextBox 28"/>
+              <a:t>Intervention state</a:t>
+            </a:r>
+          </a:p>
+        </p:txBody>
+      </p:sp>
+      <p:sp>
+        <p:nvSpPr>
+          <p:cNvPr id="59" name="TextBox 58"/>
           <p:cNvSpPr txBox="1"/>
           <p:nvPr/>
         </p:nvSpPr>
         <p:spPr>
           <a:xfrm>
-            <a:off x="-1397000" y="1277302"/>
-            <a:ext cx="3048000" cy="167640"/>
+            <a:off x="-660400" y="2098675"/>
+            <a:ext cx="3048000" cy="152400"/>
           </a:xfrm>
           <a:prstGeom prst="rect">
             <a:avLst/>
@@ -4174,27 +5290,27 @@
           <a:p>
             <a:pPr algn="l"/>
             <a:r>
-              <a:rPr sz="550" b="1" i="0">
-                <a:solidFill>
-                  <a:srgbClr val="215499"/>
+              <a:rPr sz="500" b="0" i="0">
+                <a:solidFill>
+                  <a:srgbClr val="6B727C"/>
                 </a:solidFill>
                 <a:latin typeface="Helvetica"/>
               </a:rPr>
-              <a:t>B  Visible context</a:t>
-            </a:r>
-          </a:p>
-        </p:txBody>
-      </p:sp>
-      <p:sp>
-        <p:nvSpPr>
-          <p:cNvPr id="30" name="TextBox 29"/>
+              <a:t>action identity, fraction of entries changed, change near the forecast origin</a:t>
+            </a:r>
+          </a:p>
+        </p:txBody>
+      </p:sp>
+      <p:sp>
+        <p:nvSpPr>
+          <p:cNvPr id="60" name="TextBox 59"/>
           <p:cNvSpPr txBox="1"/>
           <p:nvPr/>
         </p:nvSpPr>
         <p:spPr>
           <a:xfrm>
-            <a:off x="-558800" y="1285875"/>
-            <a:ext cx="3048000" cy="152400"/>
+            <a:off x="990600" y="2374646"/>
+            <a:ext cx="3048000" cy="158496"/>
           </a:xfrm>
           <a:prstGeom prst="rect">
             <a:avLst/>
@@ -4207,859 +5323,15 @@
           </a:bodyPr>
           <a:lstStyle/>
           <a:p>
-            <a:pPr algn="l"/>
-            <a:r>
-              <a:rPr sz="500" b="0" i="0">
-                <a:solidFill>
-                  <a:srgbClr val="6B727C"/>
+            <a:pPr algn="ctr"/>
+            <a:r>
+              <a:rPr sz="520" b="0" i="0">
+                <a:solidFill>
+                  <a:srgbClr val="19704F"/>
                 </a:solidFill>
                 <a:latin typeface="Helvetica"/>
               </a:rPr>
-              <a:t>robust scale, trend, ACF-1, seasonal ACF, vol</a:t>
-            </a:r>
-          </a:p>
-        </p:txBody>
-      </p:sp>
-      <p:sp>
-        <p:nvSpPr>
-          <p:cNvPr id="31" name="TextBox 30"/>
-          <p:cNvSpPr txBox="1"/>
-          <p:nvPr/>
-        </p:nvSpPr>
-        <p:spPr>
-          <a:xfrm>
-            <a:off x="-1397000" y="1448752"/>
-            <a:ext cx="3048000" cy="167640"/>
-          </a:xfrm>
-          <a:prstGeom prst="rect">
-            <a:avLst/>
-          </a:prstGeom>
-          <a:noFill/>
-        </p:spPr>
-        <p:txBody>
-          <a:bodyPr wrap="none" lIns="0" rIns="0" tIns="0" bIns="0" anchor="ctr">
-            <a:spAutoFit/>
-          </a:bodyPr>
-          <a:lstStyle/>
-          <a:p>
-            <a:pPr algn="l"/>
-            <a:r>
-              <a:rPr sz="550" b="1" i="0">
-                <a:solidFill>
-                  <a:srgbClr val="215499"/>
-                </a:solidFill>
-                <a:latin typeface="Helvetica"/>
-              </a:rPr>
-              <a:t>C  Intervention state</a:t>
-            </a:r>
-          </a:p>
-        </p:txBody>
-      </p:sp>
-      <p:sp>
-        <p:nvSpPr>
-          <p:cNvPr id="32" name="TextBox 31"/>
-          <p:cNvSpPr txBox="1"/>
-          <p:nvPr/>
-        </p:nvSpPr>
-        <p:spPr>
-          <a:xfrm>
-            <a:off x="-558800" y="1457325"/>
-            <a:ext cx="3048000" cy="152400"/>
-          </a:xfrm>
-          <a:prstGeom prst="rect">
-            <a:avLst/>
-          </a:prstGeom>
-          <a:noFill/>
-        </p:spPr>
-        <p:txBody>
-          <a:bodyPr wrap="none" lIns="0" rIns="0" tIns="0" bIns="0" anchor="ctr">
-            <a:spAutoFit/>
-          </a:bodyPr>
-          <a:lstStyle/>
-          <a:p>
-            <a:pPr algn="l"/>
-            <a:r>
-              <a:rPr sz="500" b="0" i="0">
-                <a:solidFill>
-                  <a:srgbClr val="6B727C"/>
-                </a:solidFill>
-                <a:latin typeface="Helvetica"/>
-              </a:rPr>
-              <a:t>change mean / max / fraction vs reference</a:t>
-            </a:r>
-          </a:p>
-        </p:txBody>
-      </p:sp>
-      <p:sp>
-        <p:nvSpPr>
-          <p:cNvPr id="33" name="TextBox 32"/>
-          <p:cNvSpPr txBox="1"/>
-          <p:nvPr/>
-        </p:nvSpPr>
-        <p:spPr>
-          <a:xfrm>
-            <a:off x="-1397000" y="1620202"/>
-            <a:ext cx="3048000" cy="167640"/>
-          </a:xfrm>
-          <a:prstGeom prst="rect">
-            <a:avLst/>
-          </a:prstGeom>
-          <a:noFill/>
-        </p:spPr>
-        <p:txBody>
-          <a:bodyPr wrap="none" lIns="0" rIns="0" tIns="0" bIns="0" anchor="ctr">
-            <a:spAutoFit/>
-          </a:bodyPr>
-          <a:lstStyle/>
-          <a:p>
-            <a:pPr algn="l"/>
-            <a:r>
-              <a:rPr sz="550" b="1" i="0">
-                <a:solidFill>
-                  <a:srgbClr val="215499"/>
-                </a:solidFill>
-                <a:latin typeface="Helvetica"/>
-              </a:rPr>
-              <a:t>D  Reference forecast</a:t>
-            </a:r>
-          </a:p>
-        </p:txBody>
-      </p:sp>
-      <p:sp>
-        <p:nvSpPr>
-          <p:cNvPr id="34" name="TextBox 33"/>
-          <p:cNvSpPr txBox="1"/>
-          <p:nvPr/>
-        </p:nvSpPr>
-        <p:spPr>
-          <a:xfrm>
-            <a:off x="-558800" y="1628775"/>
-            <a:ext cx="3048000" cy="152400"/>
-          </a:xfrm>
-          <a:prstGeom prst="rect">
-            <a:avLst/>
-          </a:prstGeom>
-          <a:noFill/>
-        </p:spPr>
-        <p:txBody>
-          <a:bodyPr wrap="none" lIns="0" rIns="0" tIns="0" bIns="0" anchor="ctr">
-            <a:spAutoFit/>
-          </a:bodyPr>
-          <a:lstStyle/>
-          <a:p>
-            <a:pPr algn="l"/>
-            <a:r>
-              <a:rPr sz="500" b="0" i="0">
-                <a:solidFill>
-                  <a:srgbClr val="6B727C"/>
-                </a:solidFill>
-                <a:latin typeface="Helvetica"/>
-              </a:rPr>
-              <a:t>mean, range, slope, first-step jump, roughness</a:t>
-            </a:r>
-          </a:p>
-        </p:txBody>
-      </p:sp>
-      <p:sp>
-        <p:nvSpPr>
-          <p:cNvPr id="35" name="Rounded Rectangle 34"/>
-          <p:cNvSpPr/>
-          <p:nvPr/>
-        </p:nvSpPr>
-        <p:spPr>
-          <a:xfrm>
-            <a:off x="2743200" y="965200"/>
-            <a:ext cx="2235200" cy="939800"/>
-          </a:xfrm>
-          <a:prstGeom prst="roundRect">
-            <a:avLst>
-              <a:gd name="adj" fmla="val 710"/>
-            </a:avLst>
-          </a:prstGeom>
-          <a:solidFill>
-            <a:srgbClr val="E5F4ED"/>
-          </a:solidFill>
-          <a:ln w="8890">
-            <a:solidFill>
-              <a:srgbClr val="19704F"/>
-            </a:solidFill>
-          </a:ln>
-          <a:effectLst/>
-        </p:spPr>
-        <p:style>
-          <a:lnRef idx="1">
-            <a:schemeClr val="accent1"/>
-          </a:lnRef>
-          <a:fillRef idx="3">
-            <a:schemeClr val="accent1"/>
-          </a:fillRef>
-          <a:effectRef idx="2">
-            <a:schemeClr val="accent1"/>
-          </a:effectRef>
-          <a:fontRef idx="minor">
-            <a:schemeClr val="lt1"/>
-          </a:fontRef>
-        </p:style>
-        <p:txBody>
-          <a:bodyPr rtlCol="0" anchor="ctr"/>
-          <a:lstStyle/>
-          <a:p>
-            <a:pPr algn="ctr"/>
-          </a:p>
-        </p:txBody>
-      </p:sp>
-      <p:sp>
-        <p:nvSpPr>
-          <p:cNvPr id="36" name="TextBox 35"/>
-          <p:cNvSpPr txBox="1"/>
-          <p:nvPr/>
-        </p:nvSpPr>
-        <p:spPr>
-          <a:xfrm>
-            <a:off x="1320800" y="982980"/>
-            <a:ext cx="3048000" cy="182879"/>
-          </a:xfrm>
-          <a:prstGeom prst="rect">
-            <a:avLst/>
-          </a:prstGeom>
-          <a:noFill/>
-        </p:spPr>
-        <p:txBody>
-          <a:bodyPr wrap="none" lIns="0" rIns="0" tIns="0" bIns="0" anchor="ctr">
-            <a:spAutoFit/>
-          </a:bodyPr>
-          <a:lstStyle/>
-          <a:p>
-            <a:pPr algn="l"/>
-            <a:r>
-              <a:rPr sz="600" b="1" i="0">
-                <a:solidFill>
-                  <a:srgbClr val="19704F"/>
-                </a:solidFill>
-                <a:latin typeface="Helvetica"/>
-              </a:rPr>
-              <a:t>Historical counterfactual replay bank</a:t>
-            </a:r>
-          </a:p>
-        </p:txBody>
-      </p:sp>
-      <p:sp>
-        <p:nvSpPr>
-          <p:cNvPr id="37" name="TextBox 36"/>
-          <p:cNvSpPr txBox="1"/>
-          <p:nvPr/>
-        </p:nvSpPr>
-        <p:spPr>
-          <a:xfrm>
-            <a:off x="1320800" y="1113409"/>
-            <a:ext cx="3048000" cy="176784"/>
-          </a:xfrm>
-          <a:prstGeom prst="rect">
-            <a:avLst/>
-          </a:prstGeom>
-          <a:noFill/>
-        </p:spPr>
-        <p:txBody>
-          <a:bodyPr wrap="none" lIns="0" rIns="0" tIns="0" bIns="0" anchor="ctr">
-            <a:spAutoFit/>
-          </a:bodyPr>
-          <a:lstStyle/>
-          <a:p>
-            <a:pPr algn="l"/>
-            <a:r>
-              <a:rPr sz="580" b="0" i="0">
-                <a:solidFill>
-                  <a:srgbClr val="1C1E23"/>
-                </a:solidFill>
-                <a:latin typeface="Helvetica"/>
-              </a:rPr>
-              <a:t>B = {(z[i], a, g[i,a])}</a:t>
-            </a:r>
-          </a:p>
-        </p:txBody>
-      </p:sp>
-      <p:sp>
-        <p:nvSpPr>
-          <p:cNvPr id="38" name="TextBox 37"/>
-          <p:cNvSpPr txBox="1"/>
-          <p:nvPr/>
-        </p:nvSpPr>
-        <p:spPr>
-          <a:xfrm>
-            <a:off x="1320800" y="1252410"/>
-            <a:ext cx="3048000" cy="155447"/>
-          </a:xfrm>
-          <a:prstGeom prst="rect">
-            <a:avLst/>
-          </a:prstGeom>
-          <a:noFill/>
-        </p:spPr>
-        <p:txBody>
-          <a:bodyPr wrap="none" lIns="0" rIns="0" tIns="0" bIns="0" anchor="ctr">
-            <a:spAutoFit/>
-          </a:bodyPr>
-          <a:lstStyle/>
-          <a:p>
-            <a:pPr algn="l"/>
-            <a:r>
-              <a:rPr sz="509" b="0" i="0">
-                <a:solidFill>
-                  <a:srgbClr val="6B727C"/>
-                </a:solidFill>
-                <a:latin typeface="Helvetica"/>
-              </a:rPr>
-              <a:t>Built once from TRAIN windows by</a:t>
-            </a:r>
-          </a:p>
-        </p:txBody>
-      </p:sp>
-      <p:sp>
-        <p:nvSpPr>
-          <p:cNvPr id="39" name="TextBox 38"/>
-          <p:cNvSpPr txBox="1"/>
-          <p:nvPr/>
-        </p:nvSpPr>
-        <p:spPr>
-          <a:xfrm>
-            <a:off x="1320800" y="1354010"/>
-            <a:ext cx="3048000" cy="155447"/>
-          </a:xfrm>
-          <a:prstGeom prst="rect">
-            <a:avLst/>
-          </a:prstGeom>
-          <a:noFill/>
-        </p:spPr>
-        <p:txBody>
-          <a:bodyPr wrap="none" lIns="0" rIns="0" tIns="0" bIns="0" anchor="ctr">
-            <a:spAutoFit/>
-          </a:bodyPr>
-          <a:lstStyle/>
-          <a:p>
-            <a:pPr algn="l"/>
-            <a:r>
-              <a:rPr sz="509" b="0" i="0">
-                <a:solidFill>
-                  <a:srgbClr val="6B727C"/>
-                </a:solidFill>
-                <a:latin typeface="Helvetica"/>
-              </a:rPr>
-              <a:t>replaying the deployment missingness</a:t>
-            </a:r>
-          </a:p>
-        </p:txBody>
-      </p:sp>
-      <p:sp>
-        <p:nvSpPr>
-          <p:cNvPr id="40" name="TextBox 39"/>
-          <p:cNvSpPr txBox="1"/>
-          <p:nvPr/>
-        </p:nvSpPr>
-        <p:spPr>
-          <a:xfrm>
-            <a:off x="1320800" y="1455610"/>
-            <a:ext cx="3048000" cy="155447"/>
-          </a:xfrm>
-          <a:prstGeom prst="rect">
-            <a:avLst/>
-          </a:prstGeom>
-          <a:noFill/>
-        </p:spPr>
-        <p:txBody>
-          <a:bodyPr wrap="none" lIns="0" rIns="0" tIns="0" bIns="0" anchor="ctr">
-            <a:spAutoFit/>
-          </a:bodyPr>
-          <a:lstStyle/>
-          <a:p>
-            <a:pPr algn="l"/>
-            <a:r>
-              <a:rPr sz="509" b="0" i="0">
-                <a:solidFill>
-                  <a:srgbClr val="6B727C"/>
-                </a:solidFill>
-                <a:latin typeface="Helvetica"/>
-              </a:rPr>
-              <a:t>and the real frozen forecaster.</a:t>
-            </a:r>
-          </a:p>
-        </p:txBody>
-      </p:sp>
-      <p:sp>
-        <p:nvSpPr>
-          <p:cNvPr id="41" name="TextBox 40"/>
-          <p:cNvSpPr txBox="1"/>
-          <p:nvPr/>
-        </p:nvSpPr>
-        <p:spPr>
-          <a:xfrm>
-            <a:off x="1320800" y="1588960"/>
-            <a:ext cx="3048000" cy="155447"/>
-          </a:xfrm>
-          <a:prstGeom prst="rect">
-            <a:avLst/>
-          </a:prstGeom>
-          <a:noFill/>
-        </p:spPr>
-        <p:txBody>
-          <a:bodyPr wrap="none" lIns="0" rIns="0" tIns="0" bIns="0" anchor="ctr">
-            <a:spAutoFit/>
-          </a:bodyPr>
-          <a:lstStyle/>
-          <a:p>
-            <a:pPr algn="l"/>
-            <a:r>
-              <a:rPr sz="509" b="0" i="0">
-                <a:solidFill>
-                  <a:srgbClr val="19704F"/>
-                </a:solidFill>
-                <a:latin typeface="Helvetica"/>
-              </a:rPr>
-              <a:t>g[i,a] is a realised forecasting</a:t>
-            </a:r>
-          </a:p>
-        </p:txBody>
-      </p:sp>
-      <p:sp>
-        <p:nvSpPr>
-          <p:cNvPr id="42" name="TextBox 41"/>
-          <p:cNvSpPr txBox="1"/>
-          <p:nvPr/>
-        </p:nvSpPr>
-        <p:spPr>
-          <a:xfrm>
-            <a:off x="1320800" y="1690560"/>
-            <a:ext cx="3048000" cy="155447"/>
-          </a:xfrm>
-          <a:prstGeom prst="rect">
-            <a:avLst/>
-          </a:prstGeom>
-          <a:noFill/>
-        </p:spPr>
-        <p:txBody>
-          <a:bodyPr wrap="none" lIns="0" rIns="0" tIns="0" bIns="0" anchor="ctr">
-            <a:spAutoFit/>
-          </a:bodyPr>
-          <a:lstStyle/>
-          <a:p>
-            <a:pPr algn="l"/>
-            <a:r>
-              <a:rPr sz="509" b="0" i="0">
-                <a:solidFill>
-                  <a:srgbClr val="19704F"/>
-                </a:solidFill>
-                <a:latin typeface="Helvetica"/>
-              </a:rPr>
-              <a:t>utility, not a reconstruction score.</a:t>
-            </a:r>
-          </a:p>
-        </p:txBody>
-      </p:sp>
-      <p:cxnSp>
-        <p:nvCxnSpPr>
-          <p:cNvPr id="43" name="Connector 42"/>
-          <p:cNvCxnSpPr/>
-          <p:nvPr/>
-        </p:nvCxnSpPr>
-        <p:spPr>
-          <a:xfrm>
-            <a:off x="1333500" y="1917700"/>
-            <a:ext cx="0" cy="101600"/>
-          </a:xfrm>
-          <a:prstGeom prst="bentConnector3">
-            <a:avLst/>
-          </a:prstGeom>
-          <a:ln w="11430">
-            <a:solidFill>
-              <a:srgbClr val="1C1E23"/>
-            </a:solidFill>
-          </a:ln>
-        </p:spPr>
-        <p:style>
-          <a:lnRef idx="2">
-            <a:schemeClr val="accent1"/>
-          </a:lnRef>
-          <a:fillRef idx="0">
-            <a:schemeClr val="accent1"/>
-          </a:fillRef>
-          <a:effectRef idx="1">
-            <a:schemeClr val="accent1"/>
-          </a:effectRef>
-          <a:fontRef idx="minor">
-            <a:schemeClr val="tx1"/>
-          </a:fontRef>
-        </p:style>
-      </p:cxnSp>
-      <p:cxnSp>
-        <p:nvCxnSpPr>
-          <p:cNvPr id="44" name="Connector 43"/>
-          <p:cNvCxnSpPr/>
-          <p:nvPr/>
-        </p:nvCxnSpPr>
-        <p:spPr>
-          <a:xfrm>
-            <a:off x="3860800" y="1917700"/>
-            <a:ext cx="0" cy="101600"/>
-          </a:xfrm>
-          <a:prstGeom prst="bentConnector3">
-            <a:avLst/>
-          </a:prstGeom>
-          <a:ln w="11430">
-            <a:solidFill>
-              <a:srgbClr val="1C1E23"/>
-            </a:solidFill>
-          </a:ln>
-        </p:spPr>
-        <p:style>
-          <a:lnRef idx="2">
-            <a:schemeClr val="accent1"/>
-          </a:lnRef>
-          <a:fillRef idx="0">
-            <a:schemeClr val="accent1"/>
-          </a:fillRef>
-          <a:effectRef idx="1">
-            <a:schemeClr val="accent1"/>
-          </a:effectRef>
-          <a:fontRef idx="minor">
-            <a:schemeClr val="tx1"/>
-          </a:fontRef>
-        </p:style>
-      </p:cxnSp>
-      <p:sp>
-        <p:nvSpPr>
-          <p:cNvPr id="45" name="Rounded Rectangle 44"/>
-          <p:cNvSpPr/>
-          <p:nvPr/>
-        </p:nvSpPr>
-        <p:spPr>
-          <a:xfrm>
-            <a:off x="50800" y="2032000"/>
-            <a:ext cx="4927600" cy="279400"/>
-          </a:xfrm>
-          <a:prstGeom prst="roundRect">
-            <a:avLst>
-              <a:gd name="adj" fmla="val 322"/>
-            </a:avLst>
-          </a:prstGeom>
-          <a:solidFill>
-            <a:srgbClr val="E5EFFC"/>
-          </a:solidFill>
-          <a:ln w="8890">
-            <a:solidFill>
-              <a:srgbClr val="215499"/>
-            </a:solidFill>
-          </a:ln>
-          <a:effectLst/>
-        </p:spPr>
-        <p:style>
-          <a:lnRef idx="1">
-            <a:schemeClr val="accent1"/>
-          </a:lnRef>
-          <a:fillRef idx="3">
-            <a:schemeClr val="accent1"/>
-          </a:fillRef>
-          <a:effectRef idx="2">
-            <a:schemeClr val="accent1"/>
-          </a:effectRef>
-          <a:fontRef idx="minor">
-            <a:schemeClr val="lt1"/>
-          </a:fontRef>
-        </p:style>
-        <p:txBody>
-          <a:bodyPr rtlCol="0" anchor="ctr"/>
-          <a:lstStyle/>
-          <a:p>
-            <a:pPr algn="ctr"/>
-          </a:p>
-        </p:txBody>
-      </p:sp>
-      <p:sp>
-        <p:nvSpPr>
-          <p:cNvPr id="46" name="TextBox 45"/>
-          <p:cNvSpPr txBox="1"/>
-          <p:nvPr/>
-        </p:nvSpPr>
-        <p:spPr>
-          <a:xfrm>
-            <a:off x="990600" y="2053158"/>
-            <a:ext cx="3048000" cy="164592"/>
-          </a:xfrm>
-          <a:prstGeom prst="rect">
-            <a:avLst/>
-          </a:prstGeom>
-          <a:noFill/>
-        </p:spPr>
-        <p:txBody>
-          <a:bodyPr wrap="none" lIns="0" rIns="0" tIns="0" bIns="0" anchor="ctr">
-            <a:spAutoFit/>
-          </a:bodyPr>
-          <a:lstStyle/>
-          <a:p>
-            <a:pPr algn="ctr"/>
-            <a:r>
-              <a:rPr sz="540" b="0" i="0">
-                <a:solidFill>
-                  <a:srgbClr val="1C1E23"/>
-                </a:solidFill>
-                <a:latin typeface="Helvetica"/>
-              </a:rPr>
-              <a:t>Task-state matching:  standardised Euclidean distance over observable state, K nearest</a:t>
-            </a:r>
-          </a:p>
-        </p:txBody>
-      </p:sp>
-      <p:sp>
-        <p:nvSpPr>
-          <p:cNvPr id="47" name="TextBox 46"/>
-          <p:cNvSpPr txBox="1"/>
-          <p:nvPr/>
-        </p:nvSpPr>
-        <p:spPr>
-          <a:xfrm>
-            <a:off x="990600" y="2145868"/>
-            <a:ext cx="3048000" cy="164592"/>
-          </a:xfrm>
-          <a:prstGeom prst="rect">
-            <a:avLst/>
-          </a:prstGeom>
-          <a:noFill/>
-        </p:spPr>
-        <p:txBody>
-          <a:bodyPr wrap="none" lIns="0" rIns="0" tIns="0" bIns="0" anchor="ctr">
-            <a:spAutoFit/>
-          </a:bodyPr>
-          <a:lstStyle/>
-          <a:p>
-            <a:pPr algn="ctr"/>
-            <a:r>
-              <a:rPr sz="540" b="0" i="0">
-                <a:solidFill>
-                  <a:srgbClr val="1C1E23"/>
-                </a:solidFill>
-                <a:latin typeface="Helvetica"/>
-              </a:rPr>
-              <a:t>same-action replays, weight w[i] = exp(-d[i] / tau)</a:t>
-            </a:r>
-          </a:p>
-        </p:txBody>
-      </p:sp>
-      <p:cxnSp>
-        <p:nvCxnSpPr>
-          <p:cNvPr id="48" name="Connector 47"/>
-          <p:cNvCxnSpPr/>
-          <p:nvPr/>
-        </p:nvCxnSpPr>
-        <p:spPr>
-          <a:xfrm>
-            <a:off x="2514600" y="2324100"/>
-            <a:ext cx="0" cy="88900"/>
-          </a:xfrm>
-          <a:prstGeom prst="bentConnector3">
-            <a:avLst/>
-          </a:prstGeom>
-          <a:ln w="11430">
-            <a:solidFill>
-              <a:srgbClr val="1C1E23"/>
-            </a:solidFill>
-          </a:ln>
-        </p:spPr>
-        <p:style>
-          <a:lnRef idx="2">
-            <a:schemeClr val="accent1"/>
-          </a:lnRef>
-          <a:fillRef idx="0">
-            <a:schemeClr val="accent1"/>
-          </a:fillRef>
-          <a:effectRef idx="1">
-            <a:schemeClr val="accent1"/>
-          </a:effectRef>
-          <a:fontRef idx="minor">
-            <a:schemeClr val="tx1"/>
-          </a:fontRef>
-        </p:style>
-      </p:cxnSp>
-      <p:sp>
-        <p:nvSpPr>
-          <p:cNvPr id="49" name="Rounded Rectangle 48"/>
-          <p:cNvSpPr/>
-          <p:nvPr/>
-        </p:nvSpPr>
-        <p:spPr>
-          <a:xfrm>
-            <a:off x="50800" y="2425700"/>
-            <a:ext cx="4927600" cy="304800"/>
-          </a:xfrm>
-          <a:prstGeom prst="roundRect">
-            <a:avLst>
-              <a:gd name="adj" fmla="val 322"/>
-            </a:avLst>
-          </a:prstGeom>
-          <a:solidFill>
-            <a:srgbClr val="FDF2DB"/>
-          </a:solidFill>
-          <a:ln w="8890">
-            <a:solidFill>
-              <a:srgbClr val="AD6B0A"/>
-            </a:solidFill>
-          </a:ln>
-          <a:effectLst/>
-        </p:spPr>
-        <p:style>
-          <a:lnRef idx="1">
-            <a:schemeClr val="accent1"/>
-          </a:lnRef>
-          <a:fillRef idx="3">
-            <a:schemeClr val="accent1"/>
-          </a:fillRef>
-          <a:effectRef idx="2">
-            <a:schemeClr val="accent1"/>
-          </a:effectRef>
-          <a:fontRef idx="minor">
-            <a:schemeClr val="lt1"/>
-          </a:fontRef>
-        </p:style>
-        <p:txBody>
-          <a:bodyPr rtlCol="0" anchor="ctr"/>
-          <a:lstStyle/>
-          <a:p>
-            <a:pPr algn="ctr"/>
-          </a:p>
-        </p:txBody>
-      </p:sp>
-      <p:sp>
-        <p:nvSpPr>
-          <p:cNvPr id="50" name="TextBox 49"/>
-          <p:cNvSpPr txBox="1"/>
-          <p:nvPr/>
-        </p:nvSpPr>
-        <p:spPr>
-          <a:xfrm>
-            <a:off x="990600" y="2459558"/>
-            <a:ext cx="3048000" cy="164592"/>
-          </a:xfrm>
-          <a:prstGeom prst="rect">
-            <a:avLst/>
-          </a:prstGeom>
-          <a:noFill/>
-        </p:spPr>
-        <p:txBody>
-          <a:bodyPr wrap="none" lIns="0" rIns="0" tIns="0" bIns="0" anchor="ctr">
-            <a:spAutoFit/>
-          </a:bodyPr>
-          <a:lstStyle/>
-          <a:p>
-            <a:pPr algn="ctr"/>
-            <a:r>
-              <a:rPr sz="540" b="0" i="0">
-                <a:solidFill>
-                  <a:srgbClr val="1C1E23"/>
-                </a:solidFill>
-                <a:latin typeface="Helvetica"/>
-              </a:rPr>
-              <a:t>Conservative intervention:  S[a] = mu[a] - beta * sigma[a] / sqrt(n_eff[a])</a:t>
-            </a:r>
-          </a:p>
-        </p:txBody>
-      </p:sp>
-      <p:sp>
-        <p:nvSpPr>
-          <p:cNvPr id="51" name="TextBox 50"/>
-          <p:cNvSpPr txBox="1"/>
-          <p:nvPr/>
-        </p:nvSpPr>
-        <p:spPr>
-          <a:xfrm>
-            <a:off x="990600" y="2552268"/>
-            <a:ext cx="3048000" cy="164592"/>
-          </a:xfrm>
-          <a:prstGeom prst="rect">
-            <a:avLst/>
-          </a:prstGeom>
-          <a:noFill/>
-        </p:spPr>
-        <p:txBody>
-          <a:bodyPr wrap="none" lIns="0" rIns="0" tIns="0" bIns="0" anchor="ctr">
-            <a:spAutoFit/>
-          </a:bodyPr>
-          <a:lstStyle/>
-          <a:p>
-            <a:pPr algn="ctr"/>
-            <a:r>
-              <a:rPr sz="540" b="0" i="0">
-                <a:solidFill>
-                  <a:srgbClr val="1C1E23"/>
-                </a:solidFill>
-                <a:latin typeface="Helvetica"/>
-              </a:rPr>
-              <a:t>ACT a* = argmax S[a] when max S[a] &gt; 0, otherwise ABSTAIN and return a0</a:t>
-            </a:r>
-          </a:p>
-        </p:txBody>
-      </p:sp>
-      <p:cxnSp>
-        <p:nvCxnSpPr>
-          <p:cNvPr id="52" name="Connector 51"/>
-          <p:cNvCxnSpPr/>
-          <p:nvPr/>
-        </p:nvCxnSpPr>
-        <p:spPr>
-          <a:xfrm>
-            <a:off x="2514600" y="2743200"/>
-            <a:ext cx="0" cy="63500"/>
-          </a:xfrm>
-          <a:prstGeom prst="bentConnector3">
-            <a:avLst/>
-          </a:prstGeom>
-          <a:ln w="12700">
-            <a:solidFill>
-              <a:srgbClr val="19704F"/>
-            </a:solidFill>
-          </a:ln>
-        </p:spPr>
-        <p:style>
-          <a:lnRef idx="2">
-            <a:schemeClr val="accent1"/>
-          </a:lnRef>
-          <a:fillRef idx="0">
-            <a:schemeClr val="accent1"/>
-          </a:fillRef>
-          <a:effectRef idx="1">
-            <a:schemeClr val="accent1"/>
-          </a:effectRef>
-          <a:fontRef idx="minor">
-            <a:schemeClr val="tx1"/>
-          </a:fontRef>
-        </p:style>
-      </p:cxnSp>
-      <p:sp>
-        <p:nvSpPr>
-          <p:cNvPr id="53" name="TextBox 52"/>
-          <p:cNvSpPr txBox="1"/>
-          <p:nvPr/>
-        </p:nvSpPr>
-        <p:spPr>
-          <a:xfrm>
-            <a:off x="990600" y="2819146"/>
-            <a:ext cx="3048000" cy="158496"/>
-          </a:xfrm>
-          <a:prstGeom prst="rect">
-            <a:avLst/>
-          </a:prstGeom>
-          <a:noFill/>
-        </p:spPr>
-        <p:txBody>
-          <a:bodyPr wrap="none" lIns="0" rIns="0" tIns="0" bIns="0" anchor="ctr">
-            <a:spAutoFit/>
-          </a:bodyPr>
-          <a:lstStyle/>
-          <a:p>
-            <a:pPr algn="ctr"/>
-            <a:r>
-              <a:rPr sz="520" b="0" i="0">
-                <a:solidFill>
-                  <a:srgbClr val="19704F"/>
-                </a:solidFill>
-                <a:latin typeface="Helvetica"/>
-              </a:rPr>
-              <a:t>one frozen TSFM forecast  F(X[a*]):  1-2 model calls, no ensemble, no output correction, no fine-tuning</a:t>
+              <a:t>the returned forecast always comes from exactly one executed input version</a:t>
             </a:r>
           </a:p>
         </p:txBody>

--- a/latex/figure/fig2_introact_architecture.pptx
+++ b/latex/figure/fig2_introact_architecture.pptx
@@ -7,7 +7,7 @@
   <p:sldIdLst>
     <p:sldId id="256" r:id="rId7"/>
   </p:sldIdLst>
-  <p:sldSz cx="5029200" cy="2616200" type="screen4x3"/>
+  <p:sldSz cx="5029200" cy="2717800" type="screen4x3"/>
   <p:notesSz cx="6858000" cy="9144000"/>
   <p:defaultTextStyle>
     <a:defPPr>
@@ -3118,7 +3118,7 @@
                 </a:solidFill>
                 <a:latin typeface="Helvetica"/>
               </a:rPr>
-              <a:t>Offline  (TRAIN only — the only place a future is read)</a:t>
+              <a:t>Offline  (TRAIN only, the only place a future is read)</a:t>
             </a:r>
           </a:p>
         </p:txBody>
@@ -3271,7 +3271,7 @@
                 </a:solidFill>
                 <a:latin typeface="Helvetica"/>
               </a:rPr>
-              <a:t>is already legal history</a:t>
+              <a:t>is available TRAIN history</a:t>
             </a:r>
           </a:p>
         </p:txBody>
@@ -3389,7 +3389,7 @@
                 </a:solidFill>
                 <a:latin typeface="Helvetica"/>
               </a:rPr>
-              <a:t>Inject the deployment</a:t>
+              <a:t>Inject the registered</a:t>
             </a:r>
           </a:p>
         </p:txBody>
@@ -3424,7 +3424,7 @@
                 </a:solidFill>
                 <a:latin typeface="Helvetica"/>
               </a:rPr>
-              <a:t>missingness mechanism</a:t>
+              <a:t>missingness protocol</a:t>
             </a:r>
           </a:p>
         </p:txBody>
@@ -3459,7 +3459,7 @@
                 </a:solidFill>
                 <a:latin typeface="Helvetica"/>
               </a:rPr>
-              <a:t>-&gt; controlled incomplete context</a:t>
+              <a:t>-&gt; incomplete context (X_i, M_i)</a:t>
             </a:r>
           </a:p>
         </p:txBody>
@@ -3577,7 +3577,7 @@
                 </a:solidFill>
                 <a:latin typeface="Helvetica"/>
               </a:rPr>
-              <a:t>Execute every legal action</a:t>
+              <a:t>Execute every catalog action</a:t>
             </a:r>
           </a:p>
         </p:txBody>
@@ -3612,7 +3612,7 @@
                 </a:solidFill>
                 <a:latin typeface="Helvetica"/>
               </a:rPr>
-              <a:t>with the frozen forecaster F;</a:t>
+              <a:t>with the frozen pipeline F;</a:t>
             </a:r>
           </a:p>
         </p:txBody>
@@ -3647,7 +3647,7 @@
                 </a:solidFill>
                 <a:latin typeface="Helvetica"/>
               </a:rPr>
-              <a:t>record L[i,a] and r[i,a]</a:t>
+              <a:t>record realised utility g[i,a]</a:t>
             </a:r>
           </a:p>
         </p:txBody>
@@ -3765,7 +3765,7 @@
                 </a:solidFill>
                 <a:latin typeface="Helvetica"/>
               </a:rPr>
-              <a:t>Counterfactual replay bank</a:t>
+              <a:t>Historical replay bank</a:t>
             </a:r>
           </a:p>
         </p:txBody>
@@ -3800,7 +3800,7 @@
                 </a:solidFill>
                 <a:latin typeface="Helvetica"/>
               </a:rPr>
-              <a:t>B = {(z[i], a, L[i,a])}</a:t>
+              <a:t>B = {(z[i,a], a, g[i,a])}</a:t>
             </a:r>
           </a:p>
         </p:txBody>
@@ -3941,7 +3941,7 @@
                 </a:solidFill>
                 <a:latin typeface="Helvetica"/>
               </a:rPr>
-              <a:t>Online  (deployment — no future is available)</a:t>
+              <a:t>Online  (deployment, no future is available)</a:t>
             </a:r>
           </a:p>
         </p:txBody>
@@ -4212,7 +4212,7 @@
                 </a:solidFill>
                 <a:latin typeface="Helvetica"/>
               </a:rPr>
-              <a:t>Observable state z</a:t>
+              <a:t>Reference call</a:t>
             </a:r>
           </a:p>
         </p:txBody>
@@ -4247,7 +4247,7 @@
                 </a:solidFill>
                 <a:latin typeface="Helvetica"/>
               </a:rPr>
-              <a:t>episode + intervention</a:t>
+              <a:t>p0 = F(X[a0]);</a:t>
             </a:r>
           </a:p>
         </p:txBody>
@@ -4282,7 +4282,7 @@
                 </a:solidFill>
                 <a:latin typeface="Helvetica"/>
               </a:rPr>
-              <a:t>state; no forecast read</a:t>
+              <a:t>action-conditioned state z_a</a:t>
             </a:r>
           </a:p>
         </p:txBody>
@@ -4400,7 +4400,7 @@
                 </a:solidFill>
                 <a:latin typeface="Helvetica"/>
               </a:rPr>
-              <a:t>Regret-aware scoring</a:t>
+              <a:t>Local utility scoring</a:t>
             </a:r>
           </a:p>
         </p:txBody>
@@ -4435,7 +4435,7 @@
                 </a:solidFill>
                 <a:latin typeface="Helvetica"/>
               </a:rPr>
-              <a:t>S[a] over the frozen bank;</a:t>
+              <a:t>same-action neighbourhoods</a:t>
             </a:r>
           </a:p>
         </p:txBody>
@@ -4470,7 +4470,7 @@
                 </a:solidFill>
                 <a:latin typeface="Helvetica"/>
               </a:rPr>
-              <a:t>a* = argmax S[a]</a:t>
+              <a:t>of the frozen bank B</a:t>
             </a:r>
           </a:p>
         </p:txBody>
@@ -4658,7 +4658,7 @@
                 </a:solidFill>
                 <a:latin typeface="Helvetica"/>
               </a:rPr>
-              <a:t>KEEP is one of the arms</a:t>
+              <a:t>KEEP means input untouched</a:t>
             </a:r>
           </a:p>
         </p:txBody>
@@ -5108,21 +5108,91 @@
                 </a:solidFill>
                 <a:latin typeface="Helvetica"/>
               </a:rPr>
-              <a:t>action catalog A: fixed and closed; KEEP is a normal arm, not an exception path</a:t>
-            </a:r>
-          </a:p>
-        </p:txBody>
-      </p:sp>
-      <p:sp>
-        <p:nvSpPr>
-          <p:cNvPr id="55" name="Rounded Rectangle 54"/>
+              <a:t>catalog A: fixed and closed; the reference action a0 is an ordinary arm</a:t>
+            </a:r>
+          </a:p>
+        </p:txBody>
+      </p:sp>
+      <p:sp>
+        <p:nvSpPr>
+          <p:cNvPr id="55" name="TextBox 54"/>
+          <p:cNvSpPr txBox="1"/>
+          <p:nvPr/>
+        </p:nvSpPr>
+        <p:spPr>
+          <a:xfrm>
+            <a:off x="-1473200" y="1831975"/>
+            <a:ext cx="3048000" cy="152400"/>
+          </a:xfrm>
+          <a:prstGeom prst="rect">
+            <a:avLst/>
+          </a:prstGeom>
+          <a:noFill/>
+        </p:spPr>
+        <p:txBody>
+          <a:bodyPr wrap="none" lIns="0" rIns="0" tIns="0" bIns="0" anchor="ctr">
+            <a:spAutoFit/>
+          </a:bodyPr>
+          <a:lstStyle/>
+          <a:p>
+            <a:pPr algn="l"/>
+            <a:r>
+              <a:rPr sz="500" b="0" i="0">
+                <a:solidFill>
+                  <a:srgbClr val="6B727C"/>
+                </a:solidFill>
+                <a:latin typeface="Helvetica"/>
+              </a:rPr>
+              <a:t>online cost: 1-2 forecasting-backbone calls (reference, plus the selected action);</a:t>
+            </a:r>
+          </a:p>
+        </p:txBody>
+      </p:sp>
+      <p:sp>
+        <p:nvSpPr>
+          <p:cNvPr id="56" name="TextBox 55"/>
+          <p:cNvSpPr txBox="1"/>
+          <p:nvPr/>
+        </p:nvSpPr>
+        <p:spPr>
+          <a:xfrm>
+            <a:off x="-1473200" y="1946275"/>
+            <a:ext cx="3048000" cy="152400"/>
+          </a:xfrm>
+          <a:prstGeom prst="rect">
+            <a:avLst/>
+          </a:prstGeom>
+          <a:noFill/>
+        </p:spPr>
+        <p:txBody>
+          <a:bodyPr wrap="none" lIns="0" rIns="0" tIns="0" bIns="0" anchor="ctr">
+            <a:spAutoFit/>
+          </a:bodyPr>
+          <a:lstStyle/>
+          <a:p>
+            <a:pPr algn="l"/>
+            <a:r>
+              <a:rPr sz="500" b="0" i="0">
+                <a:solidFill>
+                  <a:srgbClr val="6B727C"/>
+                </a:solidFill>
+                <a:latin typeface="Helvetica"/>
+              </a:rPr>
+              <a:t>candidate materialisation is paid before the decision and is counted separately</a:t>
+            </a:r>
+          </a:p>
+        </p:txBody>
+      </p:sp>
+      <p:sp>
+        <p:nvSpPr>
+          <p:cNvPr id="57" name="Rounded Rectangle 56"/>
           <p:cNvSpPr/>
           <p:nvPr/>
         </p:nvSpPr>
         <p:spPr>
           <a:xfrm>
-            <a:off x="50800" y="1905000"/>
-            <a:ext cx="4927600" cy="431800"/>
+            <a:off x="50800" y="2133600"/>
+            <a:ext cx="4927600" cy="508000"/>
           </a:xfrm>
           <a:prstGeom prst="roundRect">
             <a:avLst>
@@ -5163,14 +5233,14 @@
       </p:sp>
       <p:sp>
         <p:nvSpPr>
-          <p:cNvPr id="56" name="TextBox 55"/>
+          <p:cNvPr id="58" name="TextBox 57"/>
           <p:cNvSpPr txBox="1"/>
           <p:nvPr/>
         </p:nvSpPr>
         <p:spPr>
           <a:xfrm>
-            <a:off x="-1397000" y="1926717"/>
-            <a:ext cx="3048000" cy="164592"/>
+            <a:off x="-1397000" y="2158746"/>
+            <a:ext cx="3048000" cy="158496"/>
           </a:xfrm>
           <a:prstGeom prst="rect">
             <a:avLst/>
@@ -5185,27 +5255,27 @@
           <a:p>
             <a:pPr algn="l"/>
             <a:r>
-              <a:rPr sz="540" b="1" i="0">
+              <a:rPr sz="520" b="1" i="0">
                 <a:solidFill>
                   <a:srgbClr val="215499"/>
                 </a:solidFill>
                 <a:latin typeface="Helvetica"/>
               </a:rPr>
-              <a:t>Episode state</a:t>
-            </a:r>
-          </a:p>
-        </p:txBody>
-      </p:sp>
-      <p:sp>
-        <p:nvSpPr>
-          <p:cNvPr id="57" name="TextBox 56"/>
+              <a:t>Mask state</a:t>
+            </a:r>
+          </a:p>
+        </p:txBody>
+      </p:sp>
+      <p:sp>
+        <p:nvSpPr>
+          <p:cNvPr id="59" name="TextBox 58"/>
           <p:cNvSpPr txBox="1"/>
           <p:nvPr/>
         </p:nvSpPr>
         <p:spPr>
           <a:xfrm>
-            <a:off x="-660400" y="1933575"/>
-            <a:ext cx="3048000" cy="152400"/>
+            <a:off x="-660400" y="2163889"/>
+            <a:ext cx="3048000" cy="149352"/>
           </a:xfrm>
           <a:prstGeom prst="rect">
             <a:avLst/>
@@ -5220,27 +5290,27 @@
           <a:p>
             <a:pPr algn="l"/>
             <a:r>
-              <a:rPr sz="500" b="0" i="0">
+              <a:rPr sz="490" b="0" i="0">
                 <a:solidFill>
                   <a:srgbClr val="6B727C"/>
                 </a:solidFill>
                 <a:latin typeface="Helvetica"/>
               </a:rPr>
-              <a:t>missing ratio, run structure, distance to origin, pattern, visible-context summary</a:t>
-            </a:r>
-          </a:p>
-        </p:txBody>
-      </p:sp>
-      <p:sp>
-        <p:nvSpPr>
-          <p:cNvPr id="58" name="TextBox 57"/>
+              <a:t>missing ratio, run structure, distance to origin, pattern</a:t>
+            </a:r>
+          </a:p>
+        </p:txBody>
+      </p:sp>
+      <p:sp>
+        <p:nvSpPr>
+          <p:cNvPr id="60" name="TextBox 59"/>
           <p:cNvSpPr txBox="1"/>
           <p:nvPr/>
         </p:nvSpPr>
         <p:spPr>
           <a:xfrm>
-            <a:off x="-1397000" y="2091817"/>
-            <a:ext cx="3048000" cy="164592"/>
+            <a:off x="-1397000" y="2273046"/>
+            <a:ext cx="3048000" cy="158496"/>
           </a:xfrm>
           <a:prstGeom prst="rect">
             <a:avLst/>
@@ -5255,7 +5325,77 @@
           <a:p>
             <a:pPr algn="l"/>
             <a:r>
-              <a:rPr sz="540" b="1" i="0">
+              <a:rPr sz="520" b="1" i="0">
+                <a:solidFill>
+                  <a:srgbClr val="215499"/>
+                </a:solidFill>
+                <a:latin typeface="Helvetica"/>
+              </a:rPr>
+              <a:t>Visible-context state</a:t>
+            </a:r>
+          </a:p>
+        </p:txBody>
+      </p:sp>
+      <p:sp>
+        <p:nvSpPr>
+          <p:cNvPr id="61" name="TextBox 60"/>
+          <p:cNvSpPr txBox="1"/>
+          <p:nvPr/>
+        </p:nvSpPr>
+        <p:spPr>
+          <a:xfrm>
+            <a:off x="-660400" y="2278189"/>
+            <a:ext cx="3048000" cy="149352"/>
+          </a:xfrm>
+          <a:prstGeom prst="rect">
+            <a:avLst/>
+          </a:prstGeom>
+          <a:noFill/>
+        </p:spPr>
+        <p:txBody>
+          <a:bodyPr wrap="none" lIns="0" rIns="0" tIns="0" bIns="0" anchor="ctr">
+            <a:spAutoFit/>
+          </a:bodyPr>
+          <a:lstStyle/>
+          <a:p>
+            <a:pPr algn="l"/>
+            <a:r>
+              <a:rPr sz="490" b="0" i="0">
+                <a:solidFill>
+                  <a:srgbClr val="6B727C"/>
+                </a:solidFill>
+                <a:latin typeface="Helvetica"/>
+              </a:rPr>
+              <a:t>level, local trend, autocorrelation, seasonality, volatility</a:t>
+            </a:r>
+          </a:p>
+        </p:txBody>
+      </p:sp>
+      <p:sp>
+        <p:nvSpPr>
+          <p:cNvPr id="62" name="TextBox 61"/>
+          <p:cNvSpPr txBox="1"/>
+          <p:nvPr/>
+        </p:nvSpPr>
+        <p:spPr>
+          <a:xfrm>
+            <a:off x="-1397000" y="2387346"/>
+            <a:ext cx="3048000" cy="158496"/>
+          </a:xfrm>
+          <a:prstGeom prst="rect">
+            <a:avLst/>
+          </a:prstGeom>
+          <a:noFill/>
+        </p:spPr>
+        <p:txBody>
+          <a:bodyPr wrap="none" lIns="0" rIns="0" tIns="0" bIns="0" anchor="ctr">
+            <a:spAutoFit/>
+          </a:bodyPr>
+          <a:lstStyle/>
+          <a:p>
+            <a:pPr algn="l"/>
+            <a:r>
+              <a:rPr sz="520" b="1" i="0">
                 <a:solidFill>
                   <a:srgbClr val="215499"/>
                 </a:solidFill>
@@ -5268,14 +5408,14 @@
       </p:sp>
       <p:sp>
         <p:nvSpPr>
-          <p:cNvPr id="59" name="TextBox 58"/>
+          <p:cNvPr id="63" name="TextBox 62"/>
           <p:cNvSpPr txBox="1"/>
           <p:nvPr/>
         </p:nvSpPr>
         <p:spPr>
           <a:xfrm>
-            <a:off x="-660400" y="2098675"/>
-            <a:ext cx="3048000" cy="152400"/>
+            <a:off x="-660400" y="2392489"/>
+            <a:ext cx="3048000" cy="149352"/>
           </a:xfrm>
           <a:prstGeom prst="rect">
             <a:avLst/>
@@ -5290,27 +5430,27 @@
           <a:p>
             <a:pPr algn="l"/>
             <a:r>
-              <a:rPr sz="500" b="0" i="0">
+              <a:rPr sz="490" b="0" i="0">
                 <a:solidFill>
                   <a:srgbClr val="6B727C"/>
                 </a:solidFill>
                 <a:latin typeface="Helvetica"/>
               </a:rPr>
-              <a:t>action identity, fraction of entries changed, change near the forecast origin</a:t>
-            </a:r>
-          </a:p>
-        </p:txBody>
-      </p:sp>
-      <p:sp>
-        <p:nvSpPr>
-          <p:cNvPr id="60" name="TextBox 59"/>
+              <a:t>per action a: action identity, changed fraction, change near origin</a:t>
+            </a:r>
+          </a:p>
+        </p:txBody>
+      </p:sp>
+      <p:sp>
+        <p:nvSpPr>
+          <p:cNvPr id="64" name="TextBox 63"/>
           <p:cNvSpPr txBox="1"/>
           <p:nvPr/>
         </p:nvSpPr>
         <p:spPr>
           <a:xfrm>
-            <a:off x="990600" y="2374646"/>
-            <a:ext cx="3048000" cy="158496"/>
+            <a:off x="-1397000" y="2505075"/>
+            <a:ext cx="3048000" cy="152400"/>
           </a:xfrm>
           <a:prstGeom prst="rect">
             <a:avLst/>
@@ -5323,15 +5463,50 @@
           </a:bodyPr>
           <a:lstStyle/>
           <a:p>
-            <a:pPr algn="ctr"/>
-            <a:r>
-              <a:rPr sz="520" b="0" i="0">
-                <a:solidFill>
-                  <a:srgbClr val="19704F"/>
+            <a:pPr algn="l"/>
+            <a:r>
+              <a:rPr sz="500" b="1" i="0">
+                <a:solidFill>
+                  <a:srgbClr val="215499"/>
                 </a:solidFill>
                 <a:latin typeface="Helvetica"/>
               </a:rPr>
-              <a:t>the returned forecast always comes from exactly one executed input version</a:t>
+              <a:t>Reference-forecast state</a:t>
+            </a:r>
+          </a:p>
+        </p:txBody>
+      </p:sp>
+      <p:sp>
+        <p:nvSpPr>
+          <p:cNvPr id="65" name="TextBox 64"/>
+          <p:cNvSpPr txBox="1"/>
+          <p:nvPr/>
+        </p:nvSpPr>
+        <p:spPr>
+          <a:xfrm>
+            <a:off x="-406400" y="2506789"/>
+            <a:ext cx="3048000" cy="149352"/>
+          </a:xfrm>
+          <a:prstGeom prst="rect">
+            <a:avLst/>
+          </a:prstGeom>
+          <a:noFill/>
+        </p:spPr>
+        <p:txBody>
+          <a:bodyPr wrap="none" lIns="0" rIns="0" tIns="0" bIns="0" anchor="ctr">
+            <a:spAutoFit/>
+          </a:bodyPr>
+          <a:lstStyle/>
+          <a:p>
+            <a:pPr algn="l"/>
+            <a:r>
+              <a:rPr sz="490" b="0" i="0">
+                <a:solidFill>
+                  <a:srgbClr val="6B727C"/>
+                </a:solidFill>
+                <a:latin typeface="Helvetica"/>
+              </a:rPr>
+              <a:t>computed from p0 = F(X[a0]) only, never from a non-selected candidate</a:t>
             </a:r>
           </a:p>
         </p:txBody>
